--- a/preview_v7/cn/l-cn-bs-u8-6.pptx
+++ b/preview_v7/cn/l-cn-bs-u8-6.pptx
@@ -3142,55 +3142,14 @@
       </p:sp>
       <p:sp>
         <p:nvSpPr>
-          <p:cNvPr id="3" name="TextBox 2"/>
-          <p:cNvSpPr txBox="1"/>
-          <p:nvPr/>
-        </p:nvSpPr>
-        <p:spPr>
-          <a:xfrm>
-            <a:off x="640080" y="640080"/>
-            <a:ext cx="10911535" cy="502920"/>
-          </a:xfrm>
-          <a:prstGeom prst="rect">
-            <a:avLst/>
-          </a:prstGeom>
-          <a:noFill/>
-        </p:spPr>
-        <p:txBody>
-          <a:bodyPr wrap="square" anchor="t" lIns="0" rIns="0" tIns="0" bIns="0">
-            <a:spAutoFit/>
-          </a:bodyPr>
-          <a:lstStyle/>
-          <a:p>
-            <a:pPr algn="l">
-              <a:spcAft>
-                <a:spcPts val="0"/>
-              </a:spcAft>
-            </a:pPr>
-            <a:r>
-              <a:rPr sz="1200" b="1">
-                <a:solidFill>
-                  <a:srgbClr val="B23A2A"/>
-                </a:solidFill>
-                <a:latin typeface="微软雅黑"/>
-                <a:ea typeface="微软雅黑"/>
-                <a:cs typeface="微软雅黑"/>
-              </a:rPr>
-              <a:t>语文 · 必修上册 · 第8单元 词语积累与词语解释</a:t>
-            </a:r>
-          </a:p>
-        </p:txBody>
-      </p:sp>
-      <p:sp>
-        <p:nvSpPr>
-          <p:cNvPr id="4" name="Rectangle 3"/>
+          <p:cNvPr id="3" name="Rectangle 2"/>
           <p:cNvSpPr/>
           <p:nvPr/>
         </p:nvSpPr>
         <p:spPr>
           <a:xfrm>
-            <a:off x="640080" y="1207008"/>
-            <a:ext cx="822960" cy="30480"/>
+            <a:off x="0" y="0"/>
+            <a:ext cx="201168" cy="6858000"/>
           </a:xfrm>
           <a:prstGeom prst="rect">
             <a:avLst/>
@@ -3227,14 +3186,14 @@
       </p:sp>
       <p:sp>
         <p:nvSpPr>
-          <p:cNvPr id="5" name="TextBox 4"/>
+          <p:cNvPr id="4" name="TextBox 3"/>
           <p:cNvSpPr txBox="1"/>
           <p:nvPr/>
         </p:nvSpPr>
         <p:spPr>
           <a:xfrm>
-            <a:off x="640080" y="1737360"/>
-            <a:ext cx="10911535" cy="2011680"/>
+            <a:off x="777240" y="640080"/>
+            <a:ext cx="6400800" cy="365760"/>
           </a:xfrm>
           <a:prstGeom prst="rect">
             <a:avLst/>
@@ -3248,71 +3207,34 @@
           <a:lstStyle/>
           <a:p>
             <a:pPr algn="l">
-              <a:lnSpc>
-                <a:spcPct val="115000"/>
-              </a:lnSpc>
+              <a:spcAft>
+                <a:spcPts val="0"/>
+              </a:spcAft>
             </a:pPr>
             <a:r>
-              <a:rPr sz="4000" b="1">
-                <a:solidFill>
-                  <a:srgbClr val="1C2A33"/>
-                </a:solidFill>
-                <a:latin typeface="楷体"/>
-                <a:ea typeface="楷体"/>
-                <a:cs typeface="楷体"/>
-              </a:rPr>
-              <a:t>词语的文化意蕴——成语与熟语中的文化观念</a:t>
-            </a:r>
-          </a:p>
-        </p:txBody>
-      </p:sp>
-      <p:sp>
-        <p:nvSpPr>
-          <p:cNvPr id="6" name="TextBox 5"/>
-          <p:cNvSpPr txBox="1"/>
-          <p:nvPr/>
-        </p:nvSpPr>
-        <p:spPr>
-          <a:xfrm>
-            <a:off x="640080" y="3840480"/>
-            <a:ext cx="10911535" cy="457200"/>
-          </a:xfrm>
-          <a:prstGeom prst="rect">
-            <a:avLst/>
-          </a:prstGeom>
-          <a:noFill/>
-        </p:spPr>
-        <p:txBody>
-          <a:bodyPr wrap="square" anchor="t" lIns="0" rIns="0" tIns="0" bIns="0">
-            <a:spAutoFit/>
-          </a:bodyPr>
-          <a:lstStyle/>
-          <a:p>
-            <a:pPr algn="l"/>
-            <a:r>
-              <a:rPr sz="1700" b="1">
-                <a:solidFill>
-                  <a:srgbClr val="B23A2A"/>
+              <a:rPr sz="1300" b="1">
+                <a:solidFill>
+                  <a:srgbClr val="C8A86B"/>
                 </a:solidFill>
                 <a:latin typeface="微软雅黑"/>
                 <a:ea typeface="微软雅黑"/>
                 <a:cs typeface="微软雅黑"/>
               </a:rPr>
-              <a:t>文化意蕴  ·  第6课时  ·  45分钟</a:t>
-            </a:r>
-          </a:p>
-        </p:txBody>
-      </p:sp>
-      <p:sp>
-        <p:nvSpPr>
-          <p:cNvPr id="7" name="Rectangle 6"/>
+              <a:t>语文 · 必修上册 · 第8单元 词语积累与词语解释</a:t>
+            </a:r>
+          </a:p>
+        </p:txBody>
+      </p:sp>
+      <p:sp>
+        <p:nvSpPr>
+          <p:cNvPr id="5" name="Rectangle 4"/>
           <p:cNvSpPr/>
           <p:nvPr/>
         </p:nvSpPr>
         <p:spPr>
           <a:xfrm>
-            <a:off x="640080" y="5394960"/>
-            <a:ext cx="2011680" cy="33020"/>
+            <a:off x="777240" y="1097280"/>
+            <a:ext cx="822960" cy="30480"/>
           </a:xfrm>
           <a:prstGeom prst="rect">
             <a:avLst/>
@@ -3349,14 +3271,14 @@
       </p:sp>
       <p:sp>
         <p:nvSpPr>
-          <p:cNvPr id="8" name="TextBox 7"/>
+          <p:cNvPr id="6" name="TextBox 5"/>
           <p:cNvSpPr txBox="1"/>
           <p:nvPr/>
         </p:nvSpPr>
         <p:spPr>
           <a:xfrm>
-            <a:off x="640080" y="5623560"/>
-            <a:ext cx="10911535" cy="548640"/>
+            <a:off x="777240" y="1691640"/>
+            <a:ext cx="10637215" cy="2103120"/>
           </a:xfrm>
           <a:prstGeom prst="rect">
             <a:avLst/>
@@ -3369,24 +3291,231 @@
           </a:bodyPr>
           <a:lstStyle/>
           <a:p>
+            <a:pPr algn="l">
+              <a:lnSpc>
+                <a:spcPct val="118000"/>
+              </a:lnSpc>
+            </a:pPr>
+            <a:r>
+              <a:rPr sz="3400" b="1">
+                <a:solidFill>
+                  <a:srgbClr val="1C2A33"/>
+                </a:solidFill>
+                <a:latin typeface="楷体"/>
+                <a:ea typeface="楷体"/>
+                <a:cs typeface="楷体"/>
+              </a:rPr>
+              <a:t>词语的文化意蕴——成语与熟语中的文化观念</a:t>
+            </a:r>
+          </a:p>
+        </p:txBody>
+      </p:sp>
+      <p:sp>
+        <p:nvSpPr>
+          <p:cNvPr id="7" name="TextBox 6"/>
+          <p:cNvSpPr txBox="1"/>
+          <p:nvPr/>
+        </p:nvSpPr>
+        <p:spPr>
+          <a:xfrm>
+            <a:off x="777240" y="3840480"/>
+            <a:ext cx="10637215" cy="868680"/>
+          </a:xfrm>
+          <a:prstGeom prst="rect">
+            <a:avLst/>
+          </a:prstGeom>
+          <a:noFill/>
+        </p:spPr>
+        <p:txBody>
+          <a:bodyPr wrap="square" anchor="t" lIns="0" rIns="0" tIns="0" bIns="0">
+            <a:spAutoFit/>
+          </a:bodyPr>
+          <a:lstStyle/>
+          <a:p>
+            <a:pPr algn="l">
+              <a:lnSpc>
+                <a:spcPct val="140000"/>
+              </a:lnSpc>
+            </a:pPr>
+            <a:r>
+              <a:rPr sz="1700" b="0">
+                <a:solidFill>
+                  <a:srgbClr val="6B6258"/>
+                </a:solidFill>
+                <a:latin typeface="楷体"/>
+                <a:ea typeface="楷体"/>
+                <a:cs typeface="楷体"/>
+              </a:rPr>
+              <a:t>词语不只是工具，它装着古人的观念。</a:t>
+            </a:r>
+          </a:p>
+        </p:txBody>
+      </p:sp>
+      <p:sp>
+        <p:nvSpPr>
+          <p:cNvPr id="8" name="Rectangle 7"/>
+          <p:cNvSpPr/>
+          <p:nvPr/>
+        </p:nvSpPr>
+        <p:spPr>
+          <a:xfrm>
+            <a:off x="0" y="5943600"/>
+            <a:ext cx="12191695" cy="914400"/>
+          </a:xfrm>
+          <a:prstGeom prst="rect">
+            <a:avLst/>
+          </a:prstGeom>
+          <a:solidFill>
+            <a:srgbClr val="1C2A33"/>
+          </a:solidFill>
+          <a:ln>
+            <a:noFill/>
+          </a:ln>
+          <a:effectLst/>
+        </p:spPr>
+        <p:style>
+          <a:lnRef idx="1">
+            <a:schemeClr val="accent1"/>
+          </a:lnRef>
+          <a:fillRef idx="3">
+            <a:schemeClr val="accent1"/>
+          </a:fillRef>
+          <a:effectRef idx="2">
+            <a:schemeClr val="accent1"/>
+          </a:effectRef>
+          <a:fontRef idx="minor">
+            <a:schemeClr val="lt1"/>
+          </a:fontRef>
+        </p:style>
+        <p:txBody>
+          <a:bodyPr rtlCol="0" anchor="ctr"/>
+          <a:lstStyle/>
+          <a:p>
+            <a:pPr algn="ctr"/>
+          </a:p>
+        </p:txBody>
+      </p:sp>
+      <p:sp>
+        <p:nvSpPr>
+          <p:cNvPr id="9" name="Rectangle 8"/>
+          <p:cNvSpPr/>
+          <p:nvPr/>
+        </p:nvSpPr>
+        <p:spPr>
+          <a:xfrm>
+            <a:off x="777240" y="6144768"/>
+            <a:ext cx="822960" cy="30480"/>
+          </a:xfrm>
+          <a:prstGeom prst="rect">
+            <a:avLst/>
+          </a:prstGeom>
+          <a:solidFill>
+            <a:srgbClr val="C8A86B"/>
+          </a:solidFill>
+          <a:ln>
+            <a:noFill/>
+          </a:ln>
+          <a:effectLst/>
+        </p:spPr>
+        <p:style>
+          <a:lnRef idx="1">
+            <a:schemeClr val="accent1"/>
+          </a:lnRef>
+          <a:fillRef idx="3">
+            <a:schemeClr val="accent1"/>
+          </a:fillRef>
+          <a:effectRef idx="2">
+            <a:schemeClr val="accent1"/>
+          </a:effectRef>
+          <a:fontRef idx="minor">
+            <a:schemeClr val="lt1"/>
+          </a:fontRef>
+        </p:style>
+        <p:txBody>
+          <a:bodyPr rtlCol="0" anchor="ctr"/>
+          <a:lstStyle/>
+          <a:p>
+            <a:pPr algn="ctr"/>
+          </a:p>
+        </p:txBody>
+      </p:sp>
+      <p:sp>
+        <p:nvSpPr>
+          <p:cNvPr id="10" name="TextBox 9"/>
+          <p:cNvSpPr txBox="1"/>
+          <p:nvPr/>
+        </p:nvSpPr>
+        <p:spPr>
+          <a:xfrm>
+            <a:off x="777240" y="6181344"/>
+            <a:ext cx="10515600" cy="411480"/>
+          </a:xfrm>
+          <a:prstGeom prst="rect">
+            <a:avLst/>
+          </a:prstGeom>
+          <a:noFill/>
+        </p:spPr>
+        <p:txBody>
+          <a:bodyPr wrap="square" anchor="t" lIns="0" rIns="0" tIns="0" bIns="0">
+            <a:spAutoFit/>
+          </a:bodyPr>
+          <a:lstStyle/>
+          <a:p>
             <a:pPr algn="l"/>
             <a:r>
               <a:rPr sz="1400" b="0">
                 <a:solidFill>
-                  <a:srgbClr val="6B6258"/>
+                  <a:srgbClr val="FFFFFF"/>
                 </a:solidFill>
                 <a:latin typeface="微软雅黑"/>
                 <a:ea typeface="微软雅黑"/>
                 <a:cs typeface="微软雅黑"/>
               </a:rPr>
-              <a:t>学习任务群：语言积累    |    年级：高一</a:t>
-            </a:r>
-          </a:p>
-        </p:txBody>
-      </p:sp>
-      <p:sp>
-        <p:nvSpPr>
-          <p:cNvPr id="9" name="TextBox 8"/>
+              <a:t>第6课时 · 文化意蕴 · 学生课堂版</a:t>
+            </a:r>
+          </a:p>
+        </p:txBody>
+      </p:sp>
+      <p:sp>
+        <p:nvSpPr>
+          <p:cNvPr id="11" name="TextBox 10"/>
+          <p:cNvSpPr txBox="1"/>
+          <p:nvPr/>
+        </p:nvSpPr>
+        <p:spPr>
+          <a:xfrm>
+            <a:off x="777240" y="6473952"/>
+            <a:ext cx="10515600" cy="310896"/>
+          </a:xfrm>
+          <a:prstGeom prst="rect">
+            <a:avLst/>
+          </a:prstGeom>
+          <a:noFill/>
+        </p:spPr>
+        <p:txBody>
+          <a:bodyPr wrap="square" anchor="t" lIns="0" rIns="0" tIns="0" bIns="0">
+            <a:spAutoFit/>
+          </a:bodyPr>
+          <a:lstStyle/>
+          <a:p>
+            <a:pPr algn="l"/>
+            <a:r>
+              <a:rPr sz="1100" b="0">
+                <a:solidFill>
+                  <a:srgbClr val="E7DFD2"/>
+                </a:solidFill>
+                <a:latin typeface="微软雅黑"/>
+                <a:ea typeface="微软雅黑"/>
+                <a:cs typeface="微软雅黑"/>
+              </a:rPr>
+              <a:t>科目：语文　册次：必修上册　单元：词语积累与词语解释</a:t>
+            </a:r>
+          </a:p>
+        </p:txBody>
+      </p:sp>
+      <p:sp>
+        <p:nvSpPr>
+          <p:cNvPr id="12" name="TextBox 11"/>
           <p:cNvSpPr txBox="1"/>
           <p:nvPr/>
         </p:nvSpPr>
@@ -3519,7 +3648,7 @@
                 <a:ea typeface="微软雅黑"/>
                 <a:cs typeface="微软雅黑"/>
               </a:rPr>
-              <a:t>学习目标</a:t>
+              <a:t>本课目标</a:t>
             </a:r>
           </a:p>
         </p:txBody>
@@ -3570,14 +3699,51 @@
       </p:sp>
       <p:sp>
         <p:nvSpPr>
-          <p:cNvPr id="5" name="Rounded Rectangle 4"/>
+          <p:cNvPr id="5" name="TextBox 4"/>
+          <p:cNvSpPr txBox="1"/>
+          <p:nvPr/>
+        </p:nvSpPr>
+        <p:spPr>
+          <a:xfrm>
+            <a:off x="640080" y="1325880"/>
+            <a:ext cx="10058400" cy="640080"/>
+          </a:xfrm>
+          <a:prstGeom prst="rect">
+            <a:avLst/>
+          </a:prstGeom>
+          <a:noFill/>
+        </p:spPr>
+        <p:txBody>
+          <a:bodyPr wrap="square" anchor="t" lIns="0" rIns="0" tIns="0" bIns="0">
+            <a:spAutoFit/>
+          </a:bodyPr>
+          <a:lstStyle/>
+          <a:p>
+            <a:pPr algn="l"/>
+            <a:r>
+              <a:rPr sz="3000" b="1">
+                <a:solidFill>
+                  <a:srgbClr val="1C2A33"/>
+                </a:solidFill>
+                <a:latin typeface="楷体"/>
+                <a:ea typeface="楷体"/>
+                <a:cs typeface="楷体"/>
+              </a:rPr>
+              <a:t>四向学习目标</a:t>
+            </a:r>
+          </a:p>
+        </p:txBody>
+      </p:sp>
+      <p:sp>
+        <p:nvSpPr>
+          <p:cNvPr id="6" name="Rounded Rectangle 5"/>
           <p:cNvSpPr/>
           <p:nvPr/>
         </p:nvSpPr>
         <p:spPr>
           <a:xfrm>
-            <a:off x="640080" y="1417320"/>
-            <a:ext cx="5349240" cy="2057400"/>
+            <a:off x="640080" y="2194560"/>
+            <a:ext cx="10911535" cy="868680"/>
           </a:xfrm>
           <a:prstGeom prst="roundRect">
             <a:avLst/>
@@ -3585,7 +3751,7 @@
           <a:solidFill>
             <a:srgbClr val="FFFFFF"/>
           </a:solidFill>
-          <a:ln w="22860">
+          <a:ln w="17780">
             <a:solidFill>
               <a:srgbClr val="B23A2A"/>
             </a:solidFill>
@@ -3616,16 +3782,16 @@
       </p:sp>
       <p:sp>
         <p:nvSpPr>
-          <p:cNvPr id="6" name="Oval 5"/>
+          <p:cNvPr id="7" name="Rectangle 6"/>
           <p:cNvSpPr/>
           <p:nvPr/>
         </p:nvSpPr>
         <p:spPr>
           <a:xfrm>
-            <a:off x="804672" y="1581912"/>
-            <a:ext cx="457200" cy="457200"/>
-          </a:xfrm>
-          <a:prstGeom prst="ellipse">
+            <a:off x="640080" y="2194560"/>
+            <a:ext cx="109728" cy="868680"/>
+          </a:xfrm>
+          <a:prstGeom prst="rect">
             <a:avLst/>
           </a:prstGeom>
           <a:solidFill>
@@ -3660,14 +3826,14 @@
       </p:sp>
       <p:sp>
         <p:nvSpPr>
-          <p:cNvPr id="7" name="TextBox 6"/>
+          <p:cNvPr id="8" name="TextBox 7"/>
           <p:cNvSpPr txBox="1"/>
           <p:nvPr/>
         </p:nvSpPr>
         <p:spPr>
           <a:xfrm>
-            <a:off x="804672" y="1636776"/>
-            <a:ext cx="457200" cy="384048"/>
+            <a:off x="932688" y="2194560"/>
+            <a:ext cx="10454335" cy="868680"/>
           </a:xfrm>
           <a:prstGeom prst="rect">
             <a:avLst/>
@@ -3675,96 +3841,25 @@
           <a:noFill/>
         </p:spPr>
         <p:txBody>
-          <a:bodyPr wrap="square" anchor="t" lIns="0" rIns="0" tIns="0" bIns="0">
+          <a:bodyPr wrap="square" anchor="ctr" lIns="0" rIns="0" tIns="0" bIns="0">
             <a:spAutoFit/>
           </a:bodyPr>
           <a:lstStyle/>
           <a:p>
-            <a:pPr algn="ctr"/>
-            <a:r>
-              <a:rPr sz="1600" b="1">
-                <a:solidFill>
-                  <a:srgbClr val="FFFFFF"/>
+            <a:pPr algn="l"/>
+            <a:r>
+              <a:rPr sz="1500" b="1">
+                <a:solidFill>
+                  <a:srgbClr val="B23A2A"/>
                 </a:solidFill>
                 <a:latin typeface="微软雅黑"/>
                 <a:ea typeface="微软雅黑"/>
                 <a:cs typeface="微软雅黑"/>
               </a:rPr>
-              <a:t>1</a:t>
-            </a:r>
-          </a:p>
-        </p:txBody>
-      </p:sp>
-      <p:sp>
-        <p:nvSpPr>
-          <p:cNvPr id="8" name="TextBox 7"/>
-          <p:cNvSpPr txBox="1"/>
-          <p:nvPr/>
-        </p:nvSpPr>
-        <p:spPr>
-          <a:xfrm>
-            <a:off x="1371600" y="1527048"/>
-            <a:ext cx="4434840" cy="457200"/>
-          </a:xfrm>
-          <a:prstGeom prst="rect">
-            <a:avLst/>
-          </a:prstGeom>
-          <a:noFill/>
-        </p:spPr>
-        <p:txBody>
-          <a:bodyPr wrap="square" anchor="t" lIns="0" rIns="0" tIns="0" bIns="0">
-            <a:spAutoFit/>
-          </a:bodyPr>
-          <a:lstStyle/>
-          <a:p>
-            <a:pPr algn="l">
-              <a:lnSpc>
-                <a:spcPct val="110000"/>
-              </a:lnSpc>
-            </a:pPr>
-            <a:r>
-              <a:rPr sz="1600" b="1">
-                <a:solidFill>
-                  <a:srgbClr val="1C2A33"/>
-                </a:solidFill>
-                <a:latin typeface="微软雅黑"/>
-                <a:ea typeface="微软雅黑"/>
-                <a:cs typeface="微软雅黑"/>
-              </a:rPr>
-              <a:t>目标</a:t>
-            </a:r>
-          </a:p>
-        </p:txBody>
-      </p:sp>
-      <p:sp>
-        <p:nvSpPr>
-          <p:cNvPr id="9" name="TextBox 8"/>
-          <p:cNvSpPr txBox="1"/>
-          <p:nvPr/>
-        </p:nvSpPr>
-        <p:spPr>
-          <a:xfrm>
-            <a:off x="1371600" y="1965960"/>
-            <a:ext cx="4434840" cy="1417320"/>
-          </a:xfrm>
-          <a:prstGeom prst="rect">
-            <a:avLst/>
-          </a:prstGeom>
-          <a:noFill/>
-        </p:spPr>
-        <p:txBody>
-          <a:bodyPr wrap="square" anchor="t" lIns="0" rIns="0" tIns="0" bIns="0">
-            <a:spAutoFit/>
-          </a:bodyPr>
-          <a:lstStyle/>
-          <a:p>
-            <a:pPr algn="l">
-              <a:lnSpc>
-                <a:spcPct val="128000"/>
-              </a:lnSpc>
-            </a:pPr>
-            <a:r>
-              <a:rPr sz="1400" b="0">
+              <a:t>语言能力　</a:t>
+            </a:r>
+            <a:r>
+              <a:rPr sz="1350" b="0">
                 <a:solidFill>
                   <a:srgbClr val="1C2A33"/>
                 </a:solidFill>
@@ -3772,21 +3867,21 @@
                 <a:ea typeface="楷体"/>
                 <a:cs typeface="楷体"/>
               </a:rPr>
-              <a:t>语言能力：从成语/熟语中读出文化意蕴（如温良恭俭让、布衣、折桂），举例说明。</a:t>
-            </a:r>
-          </a:p>
-        </p:txBody>
-      </p:sp>
-      <p:sp>
-        <p:nvSpPr>
-          <p:cNvPr id="10" name="Rounded Rectangle 9"/>
+              <a:t>从成语/熟语中读出文化意蕴（如温良恭俭让、布衣、折桂），举例说明。</a:t>
+            </a:r>
+          </a:p>
+        </p:txBody>
+      </p:sp>
+      <p:sp>
+        <p:nvSpPr>
+          <p:cNvPr id="9" name="Rounded Rectangle 8"/>
           <p:cNvSpPr/>
           <p:nvPr/>
         </p:nvSpPr>
         <p:spPr>
           <a:xfrm>
-            <a:off x="6263640" y="1417320"/>
-            <a:ext cx="5349240" cy="2057400"/>
+            <a:off x="640080" y="3218688"/>
+            <a:ext cx="10911535" cy="868680"/>
           </a:xfrm>
           <a:prstGeom prst="roundRect">
             <a:avLst/>
@@ -3794,9 +3889,9 @@
           <a:solidFill>
             <a:srgbClr val="FFFFFF"/>
           </a:solidFill>
-          <a:ln w="22860">
+          <a:ln w="17780">
             <a:solidFill>
-              <a:srgbClr val="B23A2A"/>
+              <a:srgbClr val="2E7D6B"/>
             </a:solidFill>
           </a:ln>
           <a:effectLst/>
@@ -3825,20 +3920,20 @@
       </p:sp>
       <p:sp>
         <p:nvSpPr>
-          <p:cNvPr id="11" name="Oval 10"/>
+          <p:cNvPr id="10" name="Rectangle 9"/>
           <p:cNvSpPr/>
           <p:nvPr/>
         </p:nvSpPr>
         <p:spPr>
           <a:xfrm>
-            <a:off x="6428232" y="1581912"/>
-            <a:ext cx="457200" cy="457200"/>
-          </a:xfrm>
-          <a:prstGeom prst="ellipse">
+            <a:off x="640080" y="3218688"/>
+            <a:ext cx="109728" cy="868680"/>
+          </a:xfrm>
+          <a:prstGeom prst="rect">
             <a:avLst/>
           </a:prstGeom>
           <a:solidFill>
-            <a:srgbClr val="B23A2A"/>
+            <a:srgbClr val="2E7D6B"/>
           </a:solidFill>
           <a:ln>
             <a:noFill/>
@@ -3869,14 +3964,14 @@
       </p:sp>
       <p:sp>
         <p:nvSpPr>
-          <p:cNvPr id="12" name="TextBox 11"/>
+          <p:cNvPr id="11" name="TextBox 10"/>
           <p:cNvSpPr txBox="1"/>
           <p:nvPr/>
         </p:nvSpPr>
         <p:spPr>
           <a:xfrm>
-            <a:off x="6428232" y="1636776"/>
-            <a:ext cx="457200" cy="384048"/>
+            <a:off x="932688" y="3218688"/>
+            <a:ext cx="10454335" cy="868680"/>
           </a:xfrm>
           <a:prstGeom prst="rect">
             <a:avLst/>
@@ -3884,96 +3979,25 @@
           <a:noFill/>
         </p:spPr>
         <p:txBody>
-          <a:bodyPr wrap="square" anchor="t" lIns="0" rIns="0" tIns="0" bIns="0">
+          <a:bodyPr wrap="square" anchor="ctr" lIns="0" rIns="0" tIns="0" bIns="0">
             <a:spAutoFit/>
           </a:bodyPr>
           <a:lstStyle/>
           <a:p>
-            <a:pPr algn="ctr"/>
-            <a:r>
-              <a:rPr sz="1600" b="1">
-                <a:solidFill>
-                  <a:srgbClr val="FFFFFF"/>
+            <a:pPr algn="l"/>
+            <a:r>
+              <a:rPr sz="1500" b="1">
+                <a:solidFill>
+                  <a:srgbClr val="2E7D6B"/>
                 </a:solidFill>
                 <a:latin typeface="微软雅黑"/>
                 <a:ea typeface="微软雅黑"/>
                 <a:cs typeface="微软雅黑"/>
               </a:rPr>
-              <a:t>2</a:t>
-            </a:r>
-          </a:p>
-        </p:txBody>
-      </p:sp>
-      <p:sp>
-        <p:nvSpPr>
-          <p:cNvPr id="13" name="TextBox 12"/>
-          <p:cNvSpPr txBox="1"/>
-          <p:nvPr/>
-        </p:nvSpPr>
-        <p:spPr>
-          <a:xfrm>
-            <a:off x="6995160" y="1527048"/>
-            <a:ext cx="4434840" cy="457200"/>
-          </a:xfrm>
-          <a:prstGeom prst="rect">
-            <a:avLst/>
-          </a:prstGeom>
-          <a:noFill/>
-        </p:spPr>
-        <p:txBody>
-          <a:bodyPr wrap="square" anchor="t" lIns="0" rIns="0" tIns="0" bIns="0">
-            <a:spAutoFit/>
-          </a:bodyPr>
-          <a:lstStyle/>
-          <a:p>
-            <a:pPr algn="l">
-              <a:lnSpc>
-                <a:spcPct val="110000"/>
-              </a:lnSpc>
-            </a:pPr>
-            <a:r>
-              <a:rPr sz="1600" b="1">
-                <a:solidFill>
-                  <a:srgbClr val="1C2A33"/>
-                </a:solidFill>
-                <a:latin typeface="微软雅黑"/>
-                <a:ea typeface="微软雅黑"/>
-                <a:cs typeface="微软雅黑"/>
-              </a:rPr>
-              <a:t>目标</a:t>
-            </a:r>
-          </a:p>
-        </p:txBody>
-      </p:sp>
-      <p:sp>
-        <p:nvSpPr>
-          <p:cNvPr id="14" name="TextBox 13"/>
-          <p:cNvSpPr txBox="1"/>
-          <p:nvPr/>
-        </p:nvSpPr>
-        <p:spPr>
-          <a:xfrm>
-            <a:off x="6995160" y="1965960"/>
-            <a:ext cx="4434840" cy="1417320"/>
-          </a:xfrm>
-          <a:prstGeom prst="rect">
-            <a:avLst/>
-          </a:prstGeom>
-          <a:noFill/>
-        </p:spPr>
-        <p:txBody>
-          <a:bodyPr wrap="square" anchor="t" lIns="0" rIns="0" tIns="0" bIns="0">
-            <a:spAutoFit/>
-          </a:bodyPr>
-          <a:lstStyle/>
-          <a:p>
-            <a:pPr algn="l">
-              <a:lnSpc>
-                <a:spcPct val="128000"/>
-              </a:lnSpc>
-            </a:pPr>
-            <a:r>
-              <a:rPr sz="1400" b="0">
+              <a:t>文化意识　</a:t>
+            </a:r>
+            <a:r>
+              <a:rPr sz="1350" b="0">
                 <a:solidFill>
                   <a:srgbClr val="1C2A33"/>
                 </a:solidFill>
@@ -3981,21 +4005,21 @@
                 <a:ea typeface="楷体"/>
                 <a:cs typeface="楷体"/>
               </a:rPr>
-              <a:t>文化意识：理解词语是文化的载体，体会汉语承载的中华价值与观念。</a:t>
-            </a:r>
-          </a:p>
-        </p:txBody>
-      </p:sp>
-      <p:sp>
-        <p:nvSpPr>
-          <p:cNvPr id="15" name="Rounded Rectangle 14"/>
+              <a:t>理解词语是文化的载体，体会汉语承载的中华价值与观念。</a:t>
+            </a:r>
+          </a:p>
+        </p:txBody>
+      </p:sp>
+      <p:sp>
+        <p:nvSpPr>
+          <p:cNvPr id="12" name="Rounded Rectangle 11"/>
           <p:cNvSpPr/>
           <p:nvPr/>
         </p:nvSpPr>
         <p:spPr>
           <a:xfrm>
-            <a:off x="640080" y="3703320"/>
-            <a:ext cx="5349240" cy="2057400"/>
+            <a:off x="640080" y="4242816"/>
+            <a:ext cx="10911535" cy="868680"/>
           </a:xfrm>
           <a:prstGeom prst="roundRect">
             <a:avLst/>
@@ -4003,9 +4027,9 @@
           <a:solidFill>
             <a:srgbClr val="FFFFFF"/>
           </a:solidFill>
-          <a:ln w="22860">
+          <a:ln w="17780">
             <a:solidFill>
-              <a:srgbClr val="B23A2A"/>
+              <a:srgbClr val="C8A86B"/>
             </a:solidFill>
           </a:ln>
           <a:effectLst/>
@@ -4034,20 +4058,20 @@
       </p:sp>
       <p:sp>
         <p:nvSpPr>
-          <p:cNvPr id="16" name="Oval 15"/>
+          <p:cNvPr id="13" name="Rectangle 12"/>
           <p:cNvSpPr/>
           <p:nvPr/>
         </p:nvSpPr>
         <p:spPr>
           <a:xfrm>
-            <a:off x="804672" y="3867912"/>
-            <a:ext cx="457200" cy="457200"/>
-          </a:xfrm>
-          <a:prstGeom prst="ellipse">
+            <a:off x="640080" y="4242816"/>
+            <a:ext cx="109728" cy="868680"/>
+          </a:xfrm>
+          <a:prstGeom prst="rect">
             <a:avLst/>
           </a:prstGeom>
           <a:solidFill>
-            <a:srgbClr val="B23A2A"/>
+            <a:srgbClr val="C8A86B"/>
           </a:solidFill>
           <a:ln>
             <a:noFill/>
@@ -4078,14 +4102,14 @@
       </p:sp>
       <p:sp>
         <p:nvSpPr>
-          <p:cNvPr id="17" name="TextBox 16"/>
+          <p:cNvPr id="14" name="TextBox 13"/>
           <p:cNvSpPr txBox="1"/>
           <p:nvPr/>
         </p:nvSpPr>
         <p:spPr>
           <a:xfrm>
-            <a:off x="804672" y="3922776"/>
-            <a:ext cx="457200" cy="384048"/>
+            <a:off x="932688" y="4242816"/>
+            <a:ext cx="10454335" cy="868680"/>
           </a:xfrm>
           <a:prstGeom prst="rect">
             <a:avLst/>
@@ -4093,96 +4117,25 @@
           <a:noFill/>
         </p:spPr>
         <p:txBody>
-          <a:bodyPr wrap="square" anchor="t" lIns="0" rIns="0" tIns="0" bIns="0">
+          <a:bodyPr wrap="square" anchor="ctr" lIns="0" rIns="0" tIns="0" bIns="0">
             <a:spAutoFit/>
           </a:bodyPr>
           <a:lstStyle/>
           <a:p>
-            <a:pPr algn="ctr"/>
-            <a:r>
-              <a:rPr sz="1600" b="1">
-                <a:solidFill>
-                  <a:srgbClr val="FFFFFF"/>
+            <a:pPr algn="l"/>
+            <a:r>
+              <a:rPr sz="1500" b="1">
+                <a:solidFill>
+                  <a:srgbClr val="C8A86B"/>
                 </a:solidFill>
                 <a:latin typeface="微软雅黑"/>
                 <a:ea typeface="微软雅黑"/>
                 <a:cs typeface="微软雅黑"/>
               </a:rPr>
-              <a:t>3</a:t>
-            </a:r>
-          </a:p>
-        </p:txBody>
-      </p:sp>
-      <p:sp>
-        <p:nvSpPr>
-          <p:cNvPr id="18" name="TextBox 17"/>
-          <p:cNvSpPr txBox="1"/>
-          <p:nvPr/>
-        </p:nvSpPr>
-        <p:spPr>
-          <a:xfrm>
-            <a:off x="1371600" y="3813048"/>
-            <a:ext cx="4434840" cy="457200"/>
-          </a:xfrm>
-          <a:prstGeom prst="rect">
-            <a:avLst/>
-          </a:prstGeom>
-          <a:noFill/>
-        </p:spPr>
-        <p:txBody>
-          <a:bodyPr wrap="square" anchor="t" lIns="0" rIns="0" tIns="0" bIns="0">
-            <a:spAutoFit/>
-          </a:bodyPr>
-          <a:lstStyle/>
-          <a:p>
-            <a:pPr algn="l">
-              <a:lnSpc>
-                <a:spcPct val="110000"/>
-              </a:lnSpc>
-            </a:pPr>
-            <a:r>
-              <a:rPr sz="1600" b="1">
-                <a:solidFill>
-                  <a:srgbClr val="1C2A33"/>
-                </a:solidFill>
-                <a:latin typeface="微软雅黑"/>
-                <a:ea typeface="微软雅黑"/>
-                <a:cs typeface="微软雅黑"/>
-              </a:rPr>
-              <a:t>目标</a:t>
-            </a:r>
-          </a:p>
-        </p:txBody>
-      </p:sp>
-      <p:sp>
-        <p:nvSpPr>
-          <p:cNvPr id="19" name="TextBox 18"/>
-          <p:cNvSpPr txBox="1"/>
-          <p:nvPr/>
-        </p:nvSpPr>
-        <p:spPr>
-          <a:xfrm>
-            <a:off x="1371600" y="4251960"/>
-            <a:ext cx="4434840" cy="1417320"/>
-          </a:xfrm>
-          <a:prstGeom prst="rect">
-            <a:avLst/>
-          </a:prstGeom>
-          <a:noFill/>
-        </p:spPr>
-        <p:txBody>
-          <a:bodyPr wrap="square" anchor="t" lIns="0" rIns="0" tIns="0" bIns="0">
-            <a:spAutoFit/>
-          </a:bodyPr>
-          <a:lstStyle/>
-          <a:p>
-            <a:pPr algn="l">
-              <a:lnSpc>
-                <a:spcPct val="128000"/>
-              </a:lnSpc>
-            </a:pPr>
-            <a:r>
-              <a:rPr sz="1400" b="0">
+              <a:t>思维品质　</a:t>
+            </a:r>
+            <a:r>
+              <a:rPr sz="1350" b="0">
                 <a:solidFill>
                   <a:srgbClr val="1C2A33"/>
                 </a:solidFill>
@@ -4190,21 +4143,21 @@
                 <a:ea typeface="楷体"/>
                 <a:cs typeface="楷体"/>
               </a:rPr>
-              <a:t>思维品质：通过「词→观念」溯源，培养文化解码思维。</a:t>
-            </a:r>
-          </a:p>
-        </p:txBody>
-      </p:sp>
-      <p:sp>
-        <p:nvSpPr>
-          <p:cNvPr id="20" name="Rounded Rectangle 19"/>
+              <a:t>通过「词→观念」溯源，培养文化解码思维。</a:t>
+            </a:r>
+          </a:p>
+        </p:txBody>
+      </p:sp>
+      <p:sp>
+        <p:nvSpPr>
+          <p:cNvPr id="15" name="Rounded Rectangle 14"/>
           <p:cNvSpPr/>
           <p:nvPr/>
         </p:nvSpPr>
         <p:spPr>
           <a:xfrm>
-            <a:off x="6263640" y="3703320"/>
-            <a:ext cx="5349240" cy="2057400"/>
+            <a:off x="640080" y="5266944"/>
+            <a:ext cx="10911535" cy="868680"/>
           </a:xfrm>
           <a:prstGeom prst="roundRect">
             <a:avLst/>
@@ -4212,9 +4165,9 @@
           <a:solidFill>
             <a:srgbClr val="FFFFFF"/>
           </a:solidFill>
-          <a:ln w="22860">
+          <a:ln w="17780">
             <a:solidFill>
-              <a:srgbClr val="B23A2A"/>
+              <a:srgbClr val="6B6258"/>
             </a:solidFill>
           </a:ln>
           <a:effectLst/>
@@ -4243,20 +4196,20 @@
       </p:sp>
       <p:sp>
         <p:nvSpPr>
-          <p:cNvPr id="21" name="Oval 20"/>
+          <p:cNvPr id="16" name="Rectangle 15"/>
           <p:cNvSpPr/>
           <p:nvPr/>
         </p:nvSpPr>
         <p:spPr>
           <a:xfrm>
-            <a:off x="6428232" y="3867912"/>
-            <a:ext cx="457200" cy="457200"/>
-          </a:xfrm>
-          <a:prstGeom prst="ellipse">
+            <a:off x="640080" y="5266944"/>
+            <a:ext cx="109728" cy="868680"/>
+          </a:xfrm>
+          <a:prstGeom prst="rect">
             <a:avLst/>
           </a:prstGeom>
           <a:solidFill>
-            <a:srgbClr val="B23A2A"/>
+            <a:srgbClr val="6B6258"/>
           </a:solidFill>
           <a:ln>
             <a:noFill/>
@@ -4287,14 +4240,14 @@
       </p:sp>
       <p:sp>
         <p:nvSpPr>
-          <p:cNvPr id="22" name="TextBox 21"/>
+          <p:cNvPr id="17" name="TextBox 16"/>
           <p:cNvSpPr txBox="1"/>
           <p:nvPr/>
         </p:nvSpPr>
         <p:spPr>
           <a:xfrm>
-            <a:off x="6428232" y="3922776"/>
-            <a:ext cx="457200" cy="384048"/>
+            <a:off x="932688" y="5266944"/>
+            <a:ext cx="10454335" cy="868680"/>
           </a:xfrm>
           <a:prstGeom prst="rect">
             <a:avLst/>
@@ -4302,96 +4255,25 @@
           <a:noFill/>
         </p:spPr>
         <p:txBody>
-          <a:bodyPr wrap="square" anchor="t" lIns="0" rIns="0" tIns="0" bIns="0">
+          <a:bodyPr wrap="square" anchor="ctr" lIns="0" rIns="0" tIns="0" bIns="0">
             <a:spAutoFit/>
           </a:bodyPr>
           <a:lstStyle/>
           <a:p>
-            <a:pPr algn="ctr"/>
-            <a:r>
-              <a:rPr sz="1600" b="1">
-                <a:solidFill>
-                  <a:srgbClr val="FFFFFF"/>
+            <a:pPr algn="l"/>
+            <a:r>
+              <a:rPr sz="1500" b="1">
+                <a:solidFill>
+                  <a:srgbClr val="6B6258"/>
                 </a:solidFill>
                 <a:latin typeface="微软雅黑"/>
                 <a:ea typeface="微软雅黑"/>
                 <a:cs typeface="微软雅黑"/>
               </a:rPr>
-              <a:t>4</a:t>
-            </a:r>
-          </a:p>
-        </p:txBody>
-      </p:sp>
-      <p:sp>
-        <p:nvSpPr>
-          <p:cNvPr id="23" name="TextBox 22"/>
-          <p:cNvSpPr txBox="1"/>
-          <p:nvPr/>
-        </p:nvSpPr>
-        <p:spPr>
-          <a:xfrm>
-            <a:off x="6995160" y="3813048"/>
-            <a:ext cx="4434840" cy="457200"/>
-          </a:xfrm>
-          <a:prstGeom prst="rect">
-            <a:avLst/>
-          </a:prstGeom>
-          <a:noFill/>
-        </p:spPr>
-        <p:txBody>
-          <a:bodyPr wrap="square" anchor="t" lIns="0" rIns="0" tIns="0" bIns="0">
-            <a:spAutoFit/>
-          </a:bodyPr>
-          <a:lstStyle/>
-          <a:p>
-            <a:pPr algn="l">
-              <a:lnSpc>
-                <a:spcPct val="110000"/>
-              </a:lnSpc>
-            </a:pPr>
-            <a:r>
-              <a:rPr sz="1600" b="1">
-                <a:solidFill>
-                  <a:srgbClr val="1C2A33"/>
-                </a:solidFill>
-                <a:latin typeface="微软雅黑"/>
-                <a:ea typeface="微软雅黑"/>
-                <a:cs typeface="微软雅黑"/>
-              </a:rPr>
-              <a:t>目标</a:t>
-            </a:r>
-          </a:p>
-        </p:txBody>
-      </p:sp>
-      <p:sp>
-        <p:nvSpPr>
-          <p:cNvPr id="24" name="TextBox 23"/>
-          <p:cNvSpPr txBox="1"/>
-          <p:nvPr/>
-        </p:nvSpPr>
-        <p:spPr>
-          <a:xfrm>
-            <a:off x="6995160" y="4251960"/>
-            <a:ext cx="4434840" cy="1417320"/>
-          </a:xfrm>
-          <a:prstGeom prst="rect">
-            <a:avLst/>
-          </a:prstGeom>
-          <a:noFill/>
-        </p:spPr>
-        <p:txBody>
-          <a:bodyPr wrap="square" anchor="t" lIns="0" rIns="0" tIns="0" bIns="0">
-            <a:spAutoFit/>
-          </a:bodyPr>
-          <a:lstStyle/>
-          <a:p>
-            <a:pPr algn="l">
-              <a:lnSpc>
-                <a:spcPct val="128000"/>
-              </a:lnSpc>
-            </a:pPr>
-            <a:r>
-              <a:rPr sz="1400" b="0">
+              <a:t>学习能力　</a:t>
+            </a:r>
+            <a:r>
+              <a:rPr sz="1350" b="0">
                 <a:solidFill>
                   <a:srgbClr val="1C2A33"/>
                 </a:solidFill>
@@ -4399,14 +4281,14 @@
                 <a:ea typeface="楷体"/>
                 <a:cs typeface="楷体"/>
               </a:rPr>
-              <a:t>学习能力：掌握「由词见文化」的语言积累高阶法。</a:t>
-            </a:r>
-          </a:p>
-        </p:txBody>
-      </p:sp>
-      <p:sp>
-        <p:nvSpPr>
-          <p:cNvPr id="25" name="TextBox 24"/>
+              <a:t>掌握「由词见文化」的语言积累高阶法。</a:t>
+            </a:r>
+          </a:p>
+        </p:txBody>
+      </p:sp>
+      <p:sp>
+        <p:nvSpPr>
+          <p:cNvPr id="18" name="TextBox 17"/>
           <p:cNvSpPr txBox="1"/>
           <p:nvPr/>
         </p:nvSpPr>
@@ -4533,13 +4415,13 @@
             <a:r>
               <a:rPr sz="1300" b="1">
                 <a:solidFill>
-                  <a:srgbClr val="2E7D6B"/>
+                  <a:srgbClr val="B23A2A"/>
                 </a:solidFill>
                 <a:latin typeface="微软雅黑"/>
                 <a:ea typeface="微软雅黑"/>
                 <a:cs typeface="微软雅黑"/>
               </a:rPr>
-              <a:t>课文背景</a:t>
+              <a:t>背景 · 权威调研</a:t>
             </a:r>
           </a:p>
         </p:txBody>
@@ -4559,7 +4441,7 @@
             <a:avLst/>
           </a:prstGeom>
           <a:solidFill>
-            <a:srgbClr val="2E7D6B"/>
+            <a:srgbClr val="B23A2A"/>
           </a:solidFill>
           <a:ln>
             <a:noFill/>
@@ -4596,8 +4478,8 @@
         </p:nvSpPr>
         <p:spPr>
           <a:xfrm>
-            <a:off x="640080" y="1508760"/>
-            <a:ext cx="6766560" cy="4572000"/>
+            <a:off x="640080" y="1325880"/>
+            <a:ext cx="10058400" cy="640080"/>
           </a:xfrm>
           <a:prstGeom prst="rect">
             <a:avLst/>
@@ -4610,63 +4492,296 @@
           </a:bodyPr>
           <a:lstStyle/>
           <a:p>
+            <a:pPr algn="l"/>
+            <a:r>
+              <a:rPr sz="3000" b="1">
+                <a:solidFill>
+                  <a:srgbClr val="1C2A33"/>
+                </a:solidFill>
+                <a:latin typeface="楷体"/>
+                <a:ea typeface="楷体"/>
+                <a:cs typeface="楷体"/>
+              </a:rPr>
+              <a:t>教材定位与来源</a:t>
+            </a:r>
+          </a:p>
+        </p:txBody>
+      </p:sp>
+      <p:sp>
+        <p:nvSpPr>
+          <p:cNvPr id="6" name="TextBox 5"/>
+          <p:cNvSpPr txBox="1"/>
+          <p:nvPr/>
+        </p:nvSpPr>
+        <p:spPr>
+          <a:xfrm>
+            <a:off x="640080" y="1828800"/>
+            <a:ext cx="5227167" cy="457200"/>
+          </a:xfrm>
+          <a:prstGeom prst="rect">
+            <a:avLst/>
+          </a:prstGeom>
+          <a:noFill/>
+        </p:spPr>
+        <p:txBody>
+          <a:bodyPr wrap="square" anchor="t" lIns="0" rIns="0" tIns="0" bIns="0">
+            <a:spAutoFit/>
+          </a:bodyPr>
+          <a:lstStyle/>
+          <a:p>
+            <a:pPr algn="l"/>
+            <a:r>
+              <a:rPr sz="1800" b="1">
+                <a:solidFill>
+                  <a:srgbClr val="B23A2A"/>
+                </a:solidFill>
+                <a:latin typeface="楷体"/>
+                <a:ea typeface="楷体"/>
+                <a:cs typeface="楷体"/>
+              </a:rPr>
+              <a:t>教材分析</a:t>
+            </a:r>
+          </a:p>
+        </p:txBody>
+      </p:sp>
+      <p:sp>
+        <p:nvSpPr>
+          <p:cNvPr id="7" name="TextBox 6"/>
+          <p:cNvSpPr txBox="1"/>
+          <p:nvPr/>
+        </p:nvSpPr>
+        <p:spPr>
+          <a:xfrm>
+            <a:off x="640080" y="2331720"/>
+            <a:ext cx="5227167" cy="3657600"/>
+          </a:xfrm>
+          <a:prstGeom prst="rect">
+            <a:avLst/>
+          </a:prstGeom>
+          <a:noFill/>
+        </p:spPr>
+        <p:txBody>
+          <a:bodyPr wrap="square" anchor="t" lIns="0" rIns="0" tIns="0" bIns="0">
+            <a:spAutoFit/>
+          </a:bodyPr>
+          <a:lstStyle/>
+          <a:p>
             <a:pPr algn="l">
               <a:lnSpc>
                 <a:spcPct val="150000"/>
+              </a:lnSpc>
+            </a:pPr>
+            <a:r>
+              <a:rPr sz="1350" b="0">
+                <a:solidFill>
+                  <a:srgbClr val="1C2A33"/>
+                </a:solidFill>
+                <a:latin typeface="楷体"/>
+                <a:ea typeface="楷体"/>
+                <a:cs typeface="楷体"/>
+              </a:rPr>
+              <a:t>本课探词语中的文化意蕴：成语熟语藏着古人的价值与观念——如「温良恭俭让」显儒家修养，「一元复始」显循环时间观，「布衣」「巾帼」显服饰代称文化，「折桂」「及第」显科举文化。透过词语看文化，是语言积累的高阶目标。</a:t>
+            </a:r>
+          </a:p>
+        </p:txBody>
+      </p:sp>
+      <p:sp>
+        <p:nvSpPr>
+          <p:cNvPr id="8" name="Rounded Rectangle 7"/>
+          <p:cNvSpPr/>
+          <p:nvPr/>
+        </p:nvSpPr>
+        <p:spPr>
+          <a:xfrm>
+            <a:off x="6324447" y="1828800"/>
+            <a:ext cx="5227167" cy="4023360"/>
+          </a:xfrm>
+          <a:prstGeom prst="roundRect">
+            <a:avLst/>
+          </a:prstGeom>
+          <a:solidFill>
+            <a:srgbClr val="1C2A33"/>
+          </a:solidFill>
+          <a:effectLst/>
+        </p:spPr>
+        <p:style>
+          <a:lnRef idx="1">
+            <a:schemeClr val="accent1"/>
+          </a:lnRef>
+          <a:fillRef idx="3">
+            <a:schemeClr val="accent1"/>
+          </a:fillRef>
+          <a:effectRef idx="2">
+            <a:schemeClr val="accent1"/>
+          </a:effectRef>
+          <a:fontRef idx="minor">
+            <a:schemeClr val="lt1"/>
+          </a:fontRef>
+        </p:style>
+        <p:txBody>
+          <a:bodyPr rtlCol="0" anchor="ctr"/>
+          <a:lstStyle/>
+          <a:p>
+            <a:pPr algn="ctr"/>
+          </a:p>
+        </p:txBody>
+      </p:sp>
+      <p:sp>
+        <p:nvSpPr>
+          <p:cNvPr id="9" name="TextBox 8"/>
+          <p:cNvSpPr txBox="1"/>
+          <p:nvPr/>
+        </p:nvSpPr>
+        <p:spPr>
+          <a:xfrm>
+            <a:off x="6598767" y="2011680"/>
+            <a:ext cx="4678527" cy="457200"/>
+          </a:xfrm>
+          <a:prstGeom prst="rect">
+            <a:avLst/>
+          </a:prstGeom>
+          <a:noFill/>
+        </p:spPr>
+        <p:txBody>
+          <a:bodyPr wrap="square" anchor="t" lIns="0" rIns="0" tIns="0" bIns="0">
+            <a:spAutoFit/>
+          </a:bodyPr>
+          <a:lstStyle/>
+          <a:p>
+            <a:pPr algn="l"/>
+            <a:r>
+              <a:rPr sz="1600" b="1">
+                <a:solidFill>
+                  <a:srgbClr val="C8A86B"/>
+                </a:solidFill>
+                <a:latin typeface="楷体"/>
+                <a:ea typeface="楷体"/>
+                <a:cs typeface="楷体"/>
+              </a:rPr>
+              <a:t>权威来源</a:t>
+            </a:r>
+          </a:p>
+        </p:txBody>
+      </p:sp>
+      <p:sp>
+        <p:nvSpPr>
+          <p:cNvPr id="10" name="TextBox 9"/>
+          <p:cNvSpPr txBox="1"/>
+          <p:nvPr/>
+        </p:nvSpPr>
+        <p:spPr>
+          <a:xfrm>
+            <a:off x="6598767" y="2560320"/>
+            <a:ext cx="4678527" cy="2377440"/>
+          </a:xfrm>
+          <a:prstGeom prst="rect">
+            <a:avLst/>
+          </a:prstGeom>
+          <a:noFill/>
+        </p:spPr>
+        <p:txBody>
+          <a:bodyPr wrap="square" anchor="t" lIns="0" rIns="0" tIns="0" bIns="0">
+            <a:spAutoFit/>
+          </a:bodyPr>
+          <a:lstStyle/>
+          <a:p>
+            <a:pPr algn="l">
+              <a:lnSpc>
+                <a:spcPct val="145000"/>
               </a:lnSpc>
               <a:spcAft>
                 <a:spcPts val="600"/>
               </a:spcAft>
             </a:pPr>
             <a:r>
-              <a:rPr sz="1600" b="0">
-                <a:solidFill>
-                  <a:srgbClr val="1C2A33"/>
+              <a:rPr sz="1250" b="0">
+                <a:solidFill>
+                  <a:srgbClr val="FFFFFF"/>
                 </a:solidFill>
                 <a:latin typeface="楷体"/>
                 <a:ea typeface="楷体"/>
                 <a:cs typeface="楷体"/>
               </a:rPr>
-              <a:t>本课探词语中的文化意蕴：成语熟语藏着古人的价值与观念——如「温良恭俭让」显儒家修养，「一元复始」显循环时间观，「布衣」「巾帼」显服饰代称文化，「折桂」「及第」显科举文化。透过词语看文化，是语言积累的高阶目标。</a:t>
-            </a:r>
-          </a:p>
-        </p:txBody>
-      </p:sp>
-      <p:pic>
-        <p:nvPicPr>
-          <p:cNvPr id="6" name="Picture 5" descr="typewriter.jpg"/>
-          <p:cNvPicPr>
-            <a:picLocks noChangeAspect="1"/>
-          </p:cNvPicPr>
-          <p:nvPr/>
-        </p:nvPicPr>
-        <p:blipFill>
-          <a:blip r:embed="rId2"/>
-          <a:srcRect l="5860" r="5860"/>
-          <a:stretch>
-            <a:fillRect/>
-          </a:stretch>
-        </p:blipFill>
-        <p:spPr>
-          <a:xfrm>
-            <a:off x="8046720" y="1508760"/>
-            <a:ext cx="4114800" cy="3108960"/>
-          </a:xfrm>
-          <a:prstGeom prst="rect">
-            <a:avLst/>
-          </a:prstGeom>
-        </p:spPr>
-      </p:pic>
-      <p:sp>
-        <p:nvSpPr>
-          <p:cNvPr id="7" name="TextBox 6"/>
+              <a:t>中国孔子网《温良恭俭让》（出处《论语·学而》）</a:t>
+            </a:r>
+          </a:p>
+          <a:p>
+            <a:pPr algn="l">
+              <a:lnSpc>
+                <a:spcPct val="145000"/>
+              </a:lnSpc>
+              <a:spcAft>
+                <a:spcPts val="600"/>
+              </a:spcAft>
+            </a:pPr>
+            <a:r>
+              <a:rPr sz="1250" b="0">
+                <a:solidFill>
+                  <a:srgbClr val="FFFFFF"/>
+                </a:solidFill>
+                <a:latin typeface="楷体"/>
+                <a:ea typeface="楷体"/>
+                <a:cs typeface="楷体"/>
+              </a:rPr>
+              <a:t>徐州报业《蟾宫折桂：七里文脉上的成才期许》（2026-07-03）</a:t>
+            </a:r>
+          </a:p>
+        </p:txBody>
+      </p:sp>
+      <p:sp>
+        <p:nvSpPr>
+          <p:cNvPr id="11" name="Rectangle 10"/>
+          <p:cNvSpPr/>
+          <p:nvPr/>
+        </p:nvSpPr>
+        <p:spPr>
+          <a:xfrm>
+            <a:off x="6598767" y="4343400"/>
+            <a:ext cx="4678527" cy="12700"/>
+          </a:xfrm>
+          <a:prstGeom prst="rect">
+            <a:avLst/>
+          </a:prstGeom>
+          <a:solidFill>
+            <a:srgbClr val="6B6258"/>
+          </a:solidFill>
+          <a:ln>
+            <a:noFill/>
+          </a:ln>
+          <a:effectLst/>
+        </p:spPr>
+        <p:style>
+          <a:lnRef idx="1">
+            <a:schemeClr val="accent1"/>
+          </a:lnRef>
+          <a:fillRef idx="3">
+            <a:schemeClr val="accent1"/>
+          </a:fillRef>
+          <a:effectRef idx="2">
+            <a:schemeClr val="accent1"/>
+          </a:effectRef>
+          <a:fontRef idx="minor">
+            <a:schemeClr val="lt1"/>
+          </a:fontRef>
+        </p:style>
+        <p:txBody>
+          <a:bodyPr rtlCol="0" anchor="ctr"/>
+          <a:lstStyle/>
+          <a:p>
+            <a:pPr algn="ctr"/>
+          </a:p>
+        </p:txBody>
+      </p:sp>
+      <p:sp>
+        <p:nvSpPr>
+          <p:cNvPr id="12" name="TextBox 11"/>
           <p:cNvSpPr txBox="1"/>
           <p:nvPr/>
         </p:nvSpPr>
         <p:spPr>
           <a:xfrm>
-            <a:off x="8046720" y="4663440"/>
-            <a:ext cx="4114800" cy="365760"/>
+            <a:off x="6598767" y="4480560"/>
+            <a:ext cx="4678527" cy="1280160"/>
           </a:xfrm>
           <a:prstGeom prst="rect">
             <a:avLst/>
@@ -4679,24 +4794,28 @@
           </a:bodyPr>
           <a:lstStyle/>
           <a:p>
-            <a:pPr algn="ctr"/>
-            <a:r>
-              <a:rPr sz="1100" b="0">
-                <a:solidFill>
-                  <a:srgbClr val="6B6258"/>
-                </a:solidFill>
-                <a:latin typeface="微软雅黑"/>
-                <a:ea typeface="微软雅黑"/>
-                <a:cs typeface="微软雅黑"/>
+            <a:pPr algn="l">
+              <a:lnSpc>
+                <a:spcPct val="140000"/>
+              </a:lnSpc>
+            </a:pPr>
+            <a:r>
+              <a:rPr sz="1200" b="0">
+                <a:solidFill>
+                  <a:srgbClr val="E7DFD2"/>
+                </a:solidFill>
+                <a:latin typeface="楷体"/>
+                <a:ea typeface="楷体"/>
+                <a:cs typeface="楷体"/>
               </a:rPr>
-              <a:t>资料图（自由授权，复用 typewriter.jpg）</a:t>
-            </a:r>
-          </a:p>
-        </p:txBody>
-      </p:sp>
-      <p:sp>
-        <p:nvSpPr>
-          <p:cNvPr id="8" name="TextBox 7"/>
+              <a:t>本课件未使用无关配图，画面以学科色块呈现。</a:t>
+            </a:r>
+          </a:p>
+        </p:txBody>
+      </p:sp>
+      <p:sp>
+        <p:nvSpPr>
+          <p:cNvPr id="13" name="TextBox 12"/>
           <p:cNvSpPr txBox="1"/>
           <p:nvPr/>
         </p:nvSpPr>
@@ -4829,7 +4948,7 @@
                 <a:ea typeface="微软雅黑"/>
                 <a:cs typeface="微软雅黑"/>
               </a:rPr>
-              <a:t>学习重点</a:t>
+              <a:t>重点</a:t>
             </a:r>
           </a:p>
         </p:txBody>
@@ -4880,14 +4999,51 @@
       </p:sp>
       <p:sp>
         <p:nvSpPr>
-          <p:cNvPr id="5" name="Rounded Rectangle 4"/>
+          <p:cNvPr id="5" name="TextBox 4"/>
+          <p:cNvSpPr txBox="1"/>
+          <p:nvPr/>
+        </p:nvSpPr>
+        <p:spPr>
+          <a:xfrm>
+            <a:off x="640080" y="1325880"/>
+            <a:ext cx="10058400" cy="640080"/>
+          </a:xfrm>
+          <a:prstGeom prst="rect">
+            <a:avLst/>
+          </a:prstGeom>
+          <a:noFill/>
+        </p:spPr>
+        <p:txBody>
+          <a:bodyPr wrap="square" anchor="t" lIns="0" rIns="0" tIns="0" bIns="0">
+            <a:spAutoFit/>
+          </a:bodyPr>
+          <a:lstStyle/>
+          <a:p>
+            <a:pPr algn="l"/>
+            <a:r>
+              <a:rPr sz="3000" b="1">
+                <a:solidFill>
+                  <a:srgbClr val="1C2A33"/>
+                </a:solidFill>
+                <a:latin typeface="楷体"/>
+                <a:ea typeface="楷体"/>
+                <a:cs typeface="楷体"/>
+              </a:rPr>
+              <a:t>本课重点</a:t>
+            </a:r>
+          </a:p>
+        </p:txBody>
+      </p:sp>
+      <p:sp>
+        <p:nvSpPr>
+          <p:cNvPr id="6" name="Rounded Rectangle 5"/>
           <p:cNvSpPr/>
           <p:nvPr/>
         </p:nvSpPr>
         <p:spPr>
           <a:xfrm>
-            <a:off x="640080" y="1371600"/>
-            <a:ext cx="10911535" cy="1170432"/>
+            <a:off x="640080" y="2194560"/>
+            <a:ext cx="2453563" cy="3931920"/>
           </a:xfrm>
           <a:prstGeom prst="roundRect">
             <a:avLst/>
@@ -4895,7 +5051,343 @@
           <a:solidFill>
             <a:srgbClr val="FFFFFF"/>
           </a:solidFill>
-          <a:ln w="22860">
+          <a:ln w="20320">
+            <a:solidFill>
+              <a:srgbClr val="B23A2A"/>
+            </a:solidFill>
+          </a:ln>
+          <a:effectLst/>
+        </p:spPr>
+        <p:style>
+          <a:lnRef idx="1">
+            <a:schemeClr val="accent1"/>
+          </a:lnRef>
+          <a:fillRef idx="3">
+            <a:schemeClr val="accent1"/>
+          </a:fillRef>
+          <a:effectRef idx="2">
+            <a:schemeClr val="accent1"/>
+          </a:effectRef>
+          <a:fontRef idx="minor">
+            <a:schemeClr val="lt1"/>
+          </a:fontRef>
+        </p:style>
+        <p:txBody>
+          <a:bodyPr rtlCol="0" anchor="ctr"/>
+          <a:lstStyle/>
+          <a:p>
+            <a:pPr algn="ctr"/>
+          </a:p>
+        </p:txBody>
+      </p:sp>
+      <p:sp>
+        <p:nvSpPr>
+          <p:cNvPr id="7" name="Rectangle 6"/>
+          <p:cNvSpPr/>
+          <p:nvPr/>
+        </p:nvSpPr>
+        <p:spPr>
+          <a:xfrm>
+            <a:off x="640080" y="2194560"/>
+            <a:ext cx="2453563" cy="548640"/>
+          </a:xfrm>
+          <a:prstGeom prst="rect">
+            <a:avLst/>
+          </a:prstGeom>
+          <a:solidFill>
+            <a:srgbClr val="B23A2A"/>
+          </a:solidFill>
+          <a:ln>
+            <a:noFill/>
+          </a:ln>
+          <a:effectLst/>
+        </p:spPr>
+        <p:style>
+          <a:lnRef idx="1">
+            <a:schemeClr val="accent1"/>
+          </a:lnRef>
+          <a:fillRef idx="3">
+            <a:schemeClr val="accent1"/>
+          </a:fillRef>
+          <a:effectRef idx="2">
+            <a:schemeClr val="accent1"/>
+          </a:effectRef>
+          <a:fontRef idx="minor">
+            <a:schemeClr val="lt1"/>
+          </a:fontRef>
+        </p:style>
+        <p:txBody>
+          <a:bodyPr rtlCol="0" anchor="ctr"/>
+          <a:lstStyle/>
+          <a:p>
+            <a:pPr algn="ctr"/>
+          </a:p>
+        </p:txBody>
+      </p:sp>
+      <p:sp>
+        <p:nvSpPr>
+          <p:cNvPr id="8" name="TextBox 7"/>
+          <p:cNvSpPr txBox="1"/>
+          <p:nvPr/>
+        </p:nvSpPr>
+        <p:spPr>
+          <a:xfrm>
+            <a:off x="640080" y="2304288"/>
+            <a:ext cx="2453563" cy="365760"/>
+          </a:xfrm>
+          <a:prstGeom prst="rect">
+            <a:avLst/>
+          </a:prstGeom>
+          <a:noFill/>
+        </p:spPr>
+        <p:txBody>
+          <a:bodyPr wrap="square" anchor="t" lIns="0" rIns="0" tIns="0" bIns="0">
+            <a:spAutoFit/>
+          </a:bodyPr>
+          <a:lstStyle/>
+          <a:p>
+            <a:pPr algn="ctr"/>
+            <a:r>
+              <a:rPr sz="1500" b="1">
+                <a:solidFill>
+                  <a:srgbClr val="FFFFFF"/>
+                </a:solidFill>
+                <a:latin typeface="微软雅黑"/>
+                <a:ea typeface="微软雅黑"/>
+                <a:cs typeface="微软雅黑"/>
+              </a:rPr>
+              <a:t>重点 1</a:t>
+            </a:r>
+          </a:p>
+        </p:txBody>
+      </p:sp>
+      <p:sp>
+        <p:nvSpPr>
+          <p:cNvPr id="9" name="TextBox 8"/>
+          <p:cNvSpPr txBox="1"/>
+          <p:nvPr/>
+        </p:nvSpPr>
+        <p:spPr>
+          <a:xfrm>
+            <a:off x="914400" y="2971800"/>
+            <a:ext cx="1904923" cy="3017520"/>
+          </a:xfrm>
+          <a:prstGeom prst="rect">
+            <a:avLst/>
+          </a:prstGeom>
+          <a:noFill/>
+        </p:spPr>
+        <p:txBody>
+          <a:bodyPr wrap="square" anchor="t" lIns="0" rIns="0" tIns="0" bIns="0">
+            <a:spAutoFit/>
+          </a:bodyPr>
+          <a:lstStyle/>
+          <a:p>
+            <a:pPr algn="ctr">
+              <a:lnSpc>
+                <a:spcPct val="150000"/>
+              </a:lnSpc>
+            </a:pPr>
+            <a:r>
+              <a:rPr sz="1400" b="0">
+                <a:solidFill>
+                  <a:srgbClr val="1C2A33"/>
+                </a:solidFill>
+                <a:latin typeface="楷体"/>
+                <a:ea typeface="楷体"/>
+                <a:cs typeface="楷体"/>
+              </a:rPr>
+              <a:t>修养观：温良恭俭让（儒家）。</a:t>
+            </a:r>
+          </a:p>
+        </p:txBody>
+      </p:sp>
+      <p:sp>
+        <p:nvSpPr>
+          <p:cNvPr id="10" name="Rounded Rectangle 9"/>
+          <p:cNvSpPr/>
+          <p:nvPr/>
+        </p:nvSpPr>
+        <p:spPr>
+          <a:xfrm>
+            <a:off x="3459403" y="2194560"/>
+            <a:ext cx="2453563" cy="3931920"/>
+          </a:xfrm>
+          <a:prstGeom prst="roundRect">
+            <a:avLst/>
+          </a:prstGeom>
+          <a:solidFill>
+            <a:srgbClr val="FFFFFF"/>
+          </a:solidFill>
+          <a:ln w="20320">
+            <a:solidFill>
+              <a:srgbClr val="2E7D6B"/>
+            </a:solidFill>
+          </a:ln>
+          <a:effectLst/>
+        </p:spPr>
+        <p:style>
+          <a:lnRef idx="1">
+            <a:schemeClr val="accent1"/>
+          </a:lnRef>
+          <a:fillRef idx="3">
+            <a:schemeClr val="accent1"/>
+          </a:fillRef>
+          <a:effectRef idx="2">
+            <a:schemeClr val="accent1"/>
+          </a:effectRef>
+          <a:fontRef idx="minor">
+            <a:schemeClr val="lt1"/>
+          </a:fontRef>
+        </p:style>
+        <p:txBody>
+          <a:bodyPr rtlCol="0" anchor="ctr"/>
+          <a:lstStyle/>
+          <a:p>
+            <a:pPr algn="ctr"/>
+          </a:p>
+        </p:txBody>
+      </p:sp>
+      <p:sp>
+        <p:nvSpPr>
+          <p:cNvPr id="11" name="Rectangle 10"/>
+          <p:cNvSpPr/>
+          <p:nvPr/>
+        </p:nvSpPr>
+        <p:spPr>
+          <a:xfrm>
+            <a:off x="3459403" y="2194560"/>
+            <a:ext cx="2453563" cy="548640"/>
+          </a:xfrm>
+          <a:prstGeom prst="rect">
+            <a:avLst/>
+          </a:prstGeom>
+          <a:solidFill>
+            <a:srgbClr val="2E7D6B"/>
+          </a:solidFill>
+          <a:ln>
+            <a:noFill/>
+          </a:ln>
+          <a:effectLst/>
+        </p:spPr>
+        <p:style>
+          <a:lnRef idx="1">
+            <a:schemeClr val="accent1"/>
+          </a:lnRef>
+          <a:fillRef idx="3">
+            <a:schemeClr val="accent1"/>
+          </a:fillRef>
+          <a:effectRef idx="2">
+            <a:schemeClr val="accent1"/>
+          </a:effectRef>
+          <a:fontRef idx="minor">
+            <a:schemeClr val="lt1"/>
+          </a:fontRef>
+        </p:style>
+        <p:txBody>
+          <a:bodyPr rtlCol="0" anchor="ctr"/>
+          <a:lstStyle/>
+          <a:p>
+            <a:pPr algn="ctr"/>
+          </a:p>
+        </p:txBody>
+      </p:sp>
+      <p:sp>
+        <p:nvSpPr>
+          <p:cNvPr id="12" name="TextBox 11"/>
+          <p:cNvSpPr txBox="1"/>
+          <p:nvPr/>
+        </p:nvSpPr>
+        <p:spPr>
+          <a:xfrm>
+            <a:off x="3459403" y="2304288"/>
+            <a:ext cx="2453563" cy="365760"/>
+          </a:xfrm>
+          <a:prstGeom prst="rect">
+            <a:avLst/>
+          </a:prstGeom>
+          <a:noFill/>
+        </p:spPr>
+        <p:txBody>
+          <a:bodyPr wrap="square" anchor="t" lIns="0" rIns="0" tIns="0" bIns="0">
+            <a:spAutoFit/>
+          </a:bodyPr>
+          <a:lstStyle/>
+          <a:p>
+            <a:pPr algn="ctr"/>
+            <a:r>
+              <a:rPr sz="1500" b="1">
+                <a:solidFill>
+                  <a:srgbClr val="FFFFFF"/>
+                </a:solidFill>
+                <a:latin typeface="微软雅黑"/>
+                <a:ea typeface="微软雅黑"/>
+                <a:cs typeface="微软雅黑"/>
+              </a:rPr>
+              <a:t>重点 2</a:t>
+            </a:r>
+          </a:p>
+        </p:txBody>
+      </p:sp>
+      <p:sp>
+        <p:nvSpPr>
+          <p:cNvPr id="13" name="TextBox 12"/>
+          <p:cNvSpPr txBox="1"/>
+          <p:nvPr/>
+        </p:nvSpPr>
+        <p:spPr>
+          <a:xfrm>
+            <a:off x="3733723" y="2971800"/>
+            <a:ext cx="1904923" cy="3017520"/>
+          </a:xfrm>
+          <a:prstGeom prst="rect">
+            <a:avLst/>
+          </a:prstGeom>
+          <a:noFill/>
+        </p:spPr>
+        <p:txBody>
+          <a:bodyPr wrap="square" anchor="t" lIns="0" rIns="0" tIns="0" bIns="0">
+            <a:spAutoFit/>
+          </a:bodyPr>
+          <a:lstStyle/>
+          <a:p>
+            <a:pPr algn="ctr">
+              <a:lnSpc>
+                <a:spcPct val="150000"/>
+              </a:lnSpc>
+            </a:pPr>
+            <a:r>
+              <a:rPr sz="1400" b="0">
+                <a:solidFill>
+                  <a:srgbClr val="1C2A33"/>
+                </a:solidFill>
+                <a:latin typeface="楷体"/>
+                <a:ea typeface="楷体"/>
+                <a:cs typeface="楷体"/>
+              </a:rPr>
+              <a:t>称谓文化：布衣(平民)/巾帼(女)/须眉(男)。</a:t>
+            </a:r>
+          </a:p>
+        </p:txBody>
+      </p:sp>
+      <p:sp>
+        <p:nvSpPr>
+          <p:cNvPr id="14" name="Rounded Rectangle 13"/>
+          <p:cNvSpPr/>
+          <p:nvPr/>
+        </p:nvSpPr>
+        <p:spPr>
+          <a:xfrm>
+            <a:off x="6278727" y="2194560"/>
+            <a:ext cx="2453563" cy="3931920"/>
+          </a:xfrm>
+          <a:prstGeom prst="roundRect">
+            <a:avLst/>
+          </a:prstGeom>
+          <a:solidFill>
+            <a:srgbClr val="FFFFFF"/>
+          </a:solidFill>
+          <a:ln w="20320">
             <a:solidFill>
               <a:srgbClr val="C8A86B"/>
             </a:solidFill>
@@ -4926,107 +5418,23 @@
       </p:sp>
       <p:sp>
         <p:nvSpPr>
-          <p:cNvPr id="6" name="TextBox 5"/>
-          <p:cNvSpPr txBox="1"/>
-          <p:nvPr/>
-        </p:nvSpPr>
-        <p:spPr>
-          <a:xfrm>
-            <a:off x="1371600" y="1481328"/>
-            <a:ext cx="9997135" cy="457200"/>
-          </a:xfrm>
-          <a:prstGeom prst="rect">
-            <a:avLst/>
-          </a:prstGeom>
-          <a:noFill/>
-        </p:spPr>
-        <p:txBody>
-          <a:bodyPr wrap="square" anchor="t" lIns="0" rIns="0" tIns="0" bIns="0">
-            <a:spAutoFit/>
-          </a:bodyPr>
-          <a:lstStyle/>
-          <a:p>
-            <a:pPr algn="l">
-              <a:lnSpc>
-                <a:spcPct val="110000"/>
-              </a:lnSpc>
-            </a:pPr>
-            <a:r>
-              <a:rPr sz="1600" b="1">
-                <a:solidFill>
-                  <a:srgbClr val="1C2A33"/>
-                </a:solidFill>
-                <a:latin typeface="微软雅黑"/>
-                <a:ea typeface="微软雅黑"/>
-                <a:cs typeface="微软雅黑"/>
-              </a:rPr>
-              <a:t/>
-            </a:r>
-          </a:p>
-        </p:txBody>
-      </p:sp>
-      <p:sp>
-        <p:nvSpPr>
-          <p:cNvPr id="7" name="TextBox 6"/>
-          <p:cNvSpPr txBox="1"/>
-          <p:nvPr/>
-        </p:nvSpPr>
-        <p:spPr>
-          <a:xfrm>
-            <a:off x="1371600" y="1920240"/>
-            <a:ext cx="9997135" cy="530352"/>
-          </a:xfrm>
-          <a:prstGeom prst="rect">
-            <a:avLst/>
-          </a:prstGeom>
-          <a:noFill/>
-        </p:spPr>
-        <p:txBody>
-          <a:bodyPr wrap="square" anchor="t" lIns="0" rIns="0" tIns="0" bIns="0">
-            <a:spAutoFit/>
-          </a:bodyPr>
-          <a:lstStyle/>
-          <a:p>
-            <a:pPr algn="l">
-              <a:lnSpc>
-                <a:spcPct val="128000"/>
-              </a:lnSpc>
-            </a:pPr>
-            <a:r>
-              <a:rPr sz="1300" b="0">
-                <a:solidFill>
-                  <a:srgbClr val="1C2A33"/>
-                </a:solidFill>
-                <a:latin typeface="楷体"/>
-                <a:ea typeface="楷体"/>
-                <a:cs typeface="楷体"/>
-              </a:rPr>
-              <a:t>① 修养观：温良恭俭让（儒家）。</a:t>
-            </a:r>
-          </a:p>
-        </p:txBody>
-      </p:sp>
-      <p:sp>
-        <p:nvSpPr>
-          <p:cNvPr id="8" name="Rounded Rectangle 7"/>
+          <p:cNvPr id="15" name="Rectangle 14"/>
           <p:cNvSpPr/>
           <p:nvPr/>
         </p:nvSpPr>
         <p:spPr>
           <a:xfrm>
-            <a:off x="640080" y="2651760"/>
-            <a:ext cx="10911535" cy="1170432"/>
-          </a:xfrm>
-          <a:prstGeom prst="roundRect">
+            <a:off x="6278727" y="2194560"/>
+            <a:ext cx="2453563" cy="548640"/>
+          </a:xfrm>
+          <a:prstGeom prst="rect">
             <a:avLst/>
           </a:prstGeom>
           <a:solidFill>
-            <a:srgbClr val="FFFFFF"/>
+            <a:srgbClr val="C8A86B"/>
           </a:solidFill>
-          <a:ln w="22860">
-            <a:solidFill>
-              <a:srgbClr val="C8A86B"/>
-            </a:solidFill>
+          <a:ln>
+            <a:noFill/>
           </a:ln>
           <a:effectLst/>
         </p:spPr>
@@ -5054,14 +5462,14 @@
       </p:sp>
       <p:sp>
         <p:nvSpPr>
-          <p:cNvPr id="9" name="TextBox 8"/>
+          <p:cNvPr id="16" name="TextBox 15"/>
           <p:cNvSpPr txBox="1"/>
           <p:nvPr/>
         </p:nvSpPr>
         <p:spPr>
           <a:xfrm>
-            <a:off x="1371600" y="2761488"/>
-            <a:ext cx="9997135" cy="457200"/>
+            <a:off x="6278727" y="2304288"/>
+            <a:ext cx="2453563" cy="365760"/>
           </a:xfrm>
           <a:prstGeom prst="rect">
             <a:avLst/>
@@ -5074,35 +5482,31 @@
           </a:bodyPr>
           <a:lstStyle/>
           <a:p>
-            <a:pPr algn="l">
-              <a:lnSpc>
-                <a:spcPct val="110000"/>
-              </a:lnSpc>
-            </a:pPr>
-            <a:r>
-              <a:rPr sz="1600" b="1">
-                <a:solidFill>
-                  <a:srgbClr val="1C2A33"/>
+            <a:pPr algn="ctr"/>
+            <a:r>
+              <a:rPr sz="1500" b="1">
+                <a:solidFill>
+                  <a:srgbClr val="FFFFFF"/>
                 </a:solidFill>
                 <a:latin typeface="微软雅黑"/>
                 <a:ea typeface="微软雅黑"/>
                 <a:cs typeface="微软雅黑"/>
               </a:rPr>
-              <a:t/>
-            </a:r>
-          </a:p>
-        </p:txBody>
-      </p:sp>
-      <p:sp>
-        <p:nvSpPr>
-          <p:cNvPr id="10" name="TextBox 9"/>
+              <a:t>重点 3</a:t>
+            </a:r>
+          </a:p>
+        </p:txBody>
+      </p:sp>
+      <p:sp>
+        <p:nvSpPr>
+          <p:cNvPr id="17" name="TextBox 16"/>
           <p:cNvSpPr txBox="1"/>
           <p:nvPr/>
         </p:nvSpPr>
         <p:spPr>
           <a:xfrm>
-            <a:off x="1371600" y="3200400"/>
-            <a:ext cx="9997135" cy="530352"/>
+            <a:off x="6553047" y="2971800"/>
+            <a:ext cx="1904923" cy="3017520"/>
           </a:xfrm>
           <a:prstGeom prst="rect">
             <a:avLst/>
@@ -5115,13 +5519,13 @@
           </a:bodyPr>
           <a:lstStyle/>
           <a:p>
-            <a:pPr algn="l">
+            <a:pPr algn="ctr">
               <a:lnSpc>
-                <a:spcPct val="128000"/>
+                <a:spcPct val="150000"/>
               </a:lnSpc>
             </a:pPr>
             <a:r>
-              <a:rPr sz="1300" b="0">
+              <a:rPr sz="1400" b="0">
                 <a:solidFill>
                   <a:srgbClr val="1C2A33"/>
                 </a:solidFill>
@@ -5129,21 +5533,21 @@
                 <a:ea typeface="楷体"/>
                 <a:cs typeface="楷体"/>
               </a:rPr>
-              <a:t>② 称谓文化：布衣(平民)/巾帼(女)/须眉(男)。</a:t>
-            </a:r>
-          </a:p>
-        </p:txBody>
-      </p:sp>
-      <p:sp>
-        <p:nvSpPr>
-          <p:cNvPr id="11" name="Rounded Rectangle 10"/>
+              <a:t>科举文化：折桂/及第/金榜。</a:t>
+            </a:r>
+          </a:p>
+        </p:txBody>
+      </p:sp>
+      <p:sp>
+        <p:nvSpPr>
+          <p:cNvPr id="18" name="Rounded Rectangle 17"/>
           <p:cNvSpPr/>
           <p:nvPr/>
         </p:nvSpPr>
         <p:spPr>
           <a:xfrm>
-            <a:off x="640080" y="3931920"/>
-            <a:ext cx="10911535" cy="1170432"/>
+            <a:off x="9098051" y="2194560"/>
+            <a:ext cx="2453563" cy="3931920"/>
           </a:xfrm>
           <a:prstGeom prst="roundRect">
             <a:avLst/>
@@ -5151,9 +5555,9 @@
           <a:solidFill>
             <a:srgbClr val="FFFFFF"/>
           </a:solidFill>
-          <a:ln w="22860">
+          <a:ln w="20320">
             <a:solidFill>
-              <a:srgbClr val="C8A86B"/>
+              <a:srgbClr val="6B6258"/>
             </a:solidFill>
           </a:ln>
           <a:effectLst/>
@@ -5182,107 +5586,23 @@
       </p:sp>
       <p:sp>
         <p:nvSpPr>
-          <p:cNvPr id="12" name="TextBox 11"/>
-          <p:cNvSpPr txBox="1"/>
-          <p:nvPr/>
-        </p:nvSpPr>
-        <p:spPr>
-          <a:xfrm>
-            <a:off x="1371600" y="4041648"/>
-            <a:ext cx="9997135" cy="457200"/>
-          </a:xfrm>
-          <a:prstGeom prst="rect">
-            <a:avLst/>
-          </a:prstGeom>
-          <a:noFill/>
-        </p:spPr>
-        <p:txBody>
-          <a:bodyPr wrap="square" anchor="t" lIns="0" rIns="0" tIns="0" bIns="0">
-            <a:spAutoFit/>
-          </a:bodyPr>
-          <a:lstStyle/>
-          <a:p>
-            <a:pPr algn="l">
-              <a:lnSpc>
-                <a:spcPct val="110000"/>
-              </a:lnSpc>
-            </a:pPr>
-            <a:r>
-              <a:rPr sz="1600" b="1">
-                <a:solidFill>
-                  <a:srgbClr val="1C2A33"/>
-                </a:solidFill>
-                <a:latin typeface="微软雅黑"/>
-                <a:ea typeface="微软雅黑"/>
-                <a:cs typeface="微软雅黑"/>
-              </a:rPr>
-              <a:t/>
-            </a:r>
-          </a:p>
-        </p:txBody>
-      </p:sp>
-      <p:sp>
-        <p:nvSpPr>
-          <p:cNvPr id="13" name="TextBox 12"/>
-          <p:cNvSpPr txBox="1"/>
-          <p:nvPr/>
-        </p:nvSpPr>
-        <p:spPr>
-          <a:xfrm>
-            <a:off x="1371600" y="4480560"/>
-            <a:ext cx="9997135" cy="530352"/>
-          </a:xfrm>
-          <a:prstGeom prst="rect">
-            <a:avLst/>
-          </a:prstGeom>
-          <a:noFill/>
-        </p:spPr>
-        <p:txBody>
-          <a:bodyPr wrap="square" anchor="t" lIns="0" rIns="0" tIns="0" bIns="0">
-            <a:spAutoFit/>
-          </a:bodyPr>
-          <a:lstStyle/>
-          <a:p>
-            <a:pPr algn="l">
-              <a:lnSpc>
-                <a:spcPct val="128000"/>
-              </a:lnSpc>
-            </a:pPr>
-            <a:r>
-              <a:rPr sz="1300" b="0">
-                <a:solidFill>
-                  <a:srgbClr val="1C2A33"/>
-                </a:solidFill>
-                <a:latin typeface="楷体"/>
-                <a:ea typeface="楷体"/>
-                <a:cs typeface="楷体"/>
-              </a:rPr>
-              <a:t>③ 科举文化：折桂/及第/金榜。</a:t>
-            </a:r>
-          </a:p>
-        </p:txBody>
-      </p:sp>
-      <p:sp>
-        <p:nvSpPr>
-          <p:cNvPr id="14" name="Rounded Rectangle 13"/>
+          <p:cNvPr id="19" name="Rectangle 18"/>
           <p:cNvSpPr/>
           <p:nvPr/>
         </p:nvSpPr>
         <p:spPr>
           <a:xfrm>
-            <a:off x="640080" y="5212080"/>
-            <a:ext cx="10911535" cy="1170432"/>
-          </a:xfrm>
-          <a:prstGeom prst="roundRect">
+            <a:off x="9098051" y="2194560"/>
+            <a:ext cx="2453563" cy="548640"/>
+          </a:xfrm>
+          <a:prstGeom prst="rect">
             <a:avLst/>
           </a:prstGeom>
           <a:solidFill>
-            <a:srgbClr val="FFFFFF"/>
+            <a:srgbClr val="6B6258"/>
           </a:solidFill>
-          <a:ln w="22860">
-            <a:solidFill>
-              <a:srgbClr val="C8A86B"/>
-            </a:solidFill>
+          <a:ln>
+            <a:noFill/>
           </a:ln>
           <a:effectLst/>
         </p:spPr>
@@ -5310,14 +5630,14 @@
       </p:sp>
       <p:sp>
         <p:nvSpPr>
-          <p:cNvPr id="15" name="TextBox 14"/>
+          <p:cNvPr id="20" name="TextBox 19"/>
           <p:cNvSpPr txBox="1"/>
           <p:nvPr/>
         </p:nvSpPr>
         <p:spPr>
           <a:xfrm>
-            <a:off x="1371600" y="5321808"/>
-            <a:ext cx="9997135" cy="457200"/>
+            <a:off x="9098051" y="2304288"/>
+            <a:ext cx="2453563" cy="365760"/>
           </a:xfrm>
           <a:prstGeom prst="rect">
             <a:avLst/>
@@ -5330,35 +5650,31 @@
           </a:bodyPr>
           <a:lstStyle/>
           <a:p>
-            <a:pPr algn="l">
-              <a:lnSpc>
-                <a:spcPct val="110000"/>
-              </a:lnSpc>
-            </a:pPr>
-            <a:r>
-              <a:rPr sz="1600" b="1">
-                <a:solidFill>
-                  <a:srgbClr val="1C2A33"/>
+            <a:pPr algn="ctr"/>
+            <a:r>
+              <a:rPr sz="1500" b="1">
+                <a:solidFill>
+                  <a:srgbClr val="FFFFFF"/>
                 </a:solidFill>
                 <a:latin typeface="微软雅黑"/>
                 <a:ea typeface="微软雅黑"/>
                 <a:cs typeface="微软雅黑"/>
               </a:rPr>
-              <a:t/>
-            </a:r>
-          </a:p>
-        </p:txBody>
-      </p:sp>
-      <p:sp>
-        <p:nvSpPr>
-          <p:cNvPr id="16" name="TextBox 15"/>
+              <a:t>重点 4</a:t>
+            </a:r>
+          </a:p>
+        </p:txBody>
+      </p:sp>
+      <p:sp>
+        <p:nvSpPr>
+          <p:cNvPr id="21" name="TextBox 20"/>
           <p:cNvSpPr txBox="1"/>
           <p:nvPr/>
         </p:nvSpPr>
         <p:spPr>
           <a:xfrm>
-            <a:off x="1371600" y="5760720"/>
-            <a:ext cx="9997135" cy="530352"/>
+            <a:off x="9372371" y="2971800"/>
+            <a:ext cx="1904923" cy="3017520"/>
           </a:xfrm>
           <a:prstGeom prst="rect">
             <a:avLst/>
@@ -5371,13 +5687,13 @@
           </a:bodyPr>
           <a:lstStyle/>
           <a:p>
-            <a:pPr algn="l">
+            <a:pPr algn="ctr">
               <a:lnSpc>
-                <a:spcPct val="128000"/>
+                <a:spcPct val="150000"/>
               </a:lnSpc>
             </a:pPr>
             <a:r>
-              <a:rPr sz="1300" b="0">
+              <a:rPr sz="1400" b="0">
                 <a:solidFill>
                   <a:srgbClr val="1C2A33"/>
                 </a:solidFill>
@@ -5385,14 +5701,14 @@
                 <a:ea typeface="楷体"/>
                 <a:cs typeface="楷体"/>
               </a:rPr>
-              <a:t>④ 时间观：一元复始（循环）。</a:t>
-            </a:r>
-          </a:p>
-        </p:txBody>
-      </p:sp>
-      <p:sp>
-        <p:nvSpPr>
-          <p:cNvPr id="17" name="TextBox 16"/>
+              <a:t>时间观：一元复始（循环）。</a:t>
+            </a:r>
+          </a:p>
+        </p:txBody>
+      </p:sp>
+      <p:sp>
+        <p:nvSpPr>
+          <p:cNvPr id="22" name="TextBox 21"/>
           <p:cNvSpPr txBox="1"/>
           <p:nvPr/>
         </p:nvSpPr>
@@ -5519,13 +5835,13 @@
             <a:r>
               <a:rPr sz="1300" b="1">
                 <a:solidFill>
-                  <a:srgbClr val="2E7D6B"/>
+                  <a:srgbClr val="B23A2A"/>
                 </a:solidFill>
                 <a:latin typeface="微软雅黑"/>
                 <a:ea typeface="微软雅黑"/>
                 <a:cs typeface="微软雅黑"/>
               </a:rPr>
-              <a:t>学习路径</a:t>
+              <a:t>方法</a:t>
             </a:r>
           </a:p>
         </p:txBody>
@@ -5545,7 +5861,7 @@
             <a:avLst/>
           </a:prstGeom>
           <a:solidFill>
-            <a:srgbClr val="2E7D6B"/>
+            <a:srgbClr val="B23A2A"/>
           </a:solidFill>
           <a:ln>
             <a:noFill/>
@@ -5576,14 +5892,259 @@
       </p:sp>
       <p:sp>
         <p:nvSpPr>
-          <p:cNvPr id="5" name="Rounded Rectangle 4"/>
+          <p:cNvPr id="5" name="TextBox 4"/>
+          <p:cNvSpPr txBox="1"/>
+          <p:nvPr/>
+        </p:nvSpPr>
+        <p:spPr>
+          <a:xfrm>
+            <a:off x="640080" y="1325880"/>
+            <a:ext cx="10058400" cy="640080"/>
+          </a:xfrm>
+          <a:prstGeom prst="rect">
+            <a:avLst/>
+          </a:prstGeom>
+          <a:noFill/>
+        </p:spPr>
+        <p:txBody>
+          <a:bodyPr wrap="square" anchor="t" lIns="0" rIns="0" tIns="0" bIns="0">
+            <a:spAutoFit/>
+          </a:bodyPr>
+          <a:lstStyle/>
+          <a:p>
+            <a:pPr algn="l"/>
+            <a:r>
+              <a:rPr sz="3000" b="1">
+                <a:solidFill>
+                  <a:srgbClr val="1C2A33"/>
+                </a:solidFill>
+                <a:latin typeface="楷体"/>
+                <a:ea typeface="楷体"/>
+                <a:cs typeface="楷体"/>
+              </a:rPr>
+              <a:t>学习路径</a:t>
+            </a:r>
+          </a:p>
+        </p:txBody>
+      </p:sp>
+      <p:sp>
+        <p:nvSpPr>
+          <p:cNvPr id="6" name="Rounded Rectangle 5"/>
           <p:cNvSpPr/>
           <p:nvPr/>
         </p:nvSpPr>
         <p:spPr>
           <a:xfrm>
-            <a:off x="640080" y="1371600"/>
-            <a:ext cx="10911535" cy="685800"/>
+            <a:off x="640080" y="2194560"/>
+            <a:ext cx="2453563" cy="3657600"/>
+          </a:xfrm>
+          <a:prstGeom prst="roundRect">
+            <a:avLst/>
+          </a:prstGeom>
+          <a:solidFill>
+            <a:srgbClr val="FFFFFF"/>
+          </a:solidFill>
+          <a:ln w="22860">
+            <a:solidFill>
+              <a:srgbClr val="B23A2A"/>
+            </a:solidFill>
+          </a:ln>
+          <a:effectLst/>
+        </p:spPr>
+        <p:style>
+          <a:lnRef idx="1">
+            <a:schemeClr val="accent1"/>
+          </a:lnRef>
+          <a:fillRef idx="3">
+            <a:schemeClr val="accent1"/>
+          </a:fillRef>
+          <a:effectRef idx="2">
+            <a:schemeClr val="accent1"/>
+          </a:effectRef>
+          <a:fontRef idx="minor">
+            <a:schemeClr val="lt1"/>
+          </a:fontRef>
+        </p:style>
+        <p:txBody>
+          <a:bodyPr rtlCol="0" anchor="ctr"/>
+          <a:lstStyle/>
+          <a:p>
+            <a:pPr algn="ctr"/>
+          </a:p>
+        </p:txBody>
+      </p:sp>
+      <p:sp>
+        <p:nvSpPr>
+          <p:cNvPr id="7" name="Oval 6"/>
+          <p:cNvSpPr/>
+          <p:nvPr/>
+        </p:nvSpPr>
+        <p:spPr>
+          <a:xfrm>
+            <a:off x="804672" y="2359152"/>
+            <a:ext cx="457200" cy="457200"/>
+          </a:xfrm>
+          <a:prstGeom prst="ellipse">
+            <a:avLst/>
+          </a:prstGeom>
+          <a:solidFill>
+            <a:srgbClr val="B23A2A"/>
+          </a:solidFill>
+          <a:ln>
+            <a:noFill/>
+          </a:ln>
+          <a:effectLst/>
+        </p:spPr>
+        <p:style>
+          <a:lnRef idx="1">
+            <a:schemeClr val="accent1"/>
+          </a:lnRef>
+          <a:fillRef idx="3">
+            <a:schemeClr val="accent1"/>
+          </a:fillRef>
+          <a:effectRef idx="2">
+            <a:schemeClr val="accent1"/>
+          </a:effectRef>
+          <a:fontRef idx="minor">
+            <a:schemeClr val="lt1"/>
+          </a:fontRef>
+        </p:style>
+        <p:txBody>
+          <a:bodyPr rtlCol="0" anchor="ctr"/>
+          <a:lstStyle/>
+          <a:p>
+            <a:pPr algn="ctr"/>
+          </a:p>
+        </p:txBody>
+      </p:sp>
+      <p:sp>
+        <p:nvSpPr>
+          <p:cNvPr id="8" name="TextBox 7"/>
+          <p:cNvSpPr txBox="1"/>
+          <p:nvPr/>
+        </p:nvSpPr>
+        <p:spPr>
+          <a:xfrm>
+            <a:off x="804672" y="2414016"/>
+            <a:ext cx="457200" cy="384048"/>
+          </a:xfrm>
+          <a:prstGeom prst="rect">
+            <a:avLst/>
+          </a:prstGeom>
+          <a:noFill/>
+        </p:spPr>
+        <p:txBody>
+          <a:bodyPr wrap="square" anchor="t" lIns="0" rIns="0" tIns="0" bIns="0">
+            <a:spAutoFit/>
+          </a:bodyPr>
+          <a:lstStyle/>
+          <a:p>
+            <a:pPr algn="ctr"/>
+            <a:r>
+              <a:rPr sz="1600" b="1">
+                <a:solidFill>
+                  <a:srgbClr val="FFFFFF"/>
+                </a:solidFill>
+                <a:latin typeface="微软雅黑"/>
+                <a:ea typeface="微软雅黑"/>
+                <a:cs typeface="微软雅黑"/>
+              </a:rPr>
+              <a:t>1</a:t>
+            </a:r>
+          </a:p>
+        </p:txBody>
+      </p:sp>
+      <p:sp>
+        <p:nvSpPr>
+          <p:cNvPr id="9" name="TextBox 8"/>
+          <p:cNvSpPr txBox="1"/>
+          <p:nvPr/>
+        </p:nvSpPr>
+        <p:spPr>
+          <a:xfrm>
+            <a:off x="1371600" y="2359152"/>
+            <a:ext cx="1539163" cy="457200"/>
+          </a:xfrm>
+          <a:prstGeom prst="rect">
+            <a:avLst/>
+          </a:prstGeom>
+          <a:noFill/>
+        </p:spPr>
+        <p:txBody>
+          <a:bodyPr wrap="square" anchor="t" lIns="0" rIns="0" tIns="0" bIns="0">
+            <a:spAutoFit/>
+          </a:bodyPr>
+          <a:lstStyle/>
+          <a:p>
+            <a:pPr algn="l"/>
+            <a:r>
+              <a:rPr sz="1700" b="1">
+                <a:solidFill>
+                  <a:srgbClr val="1C2A33"/>
+                </a:solidFill>
+                <a:latin typeface="微软雅黑"/>
+                <a:ea typeface="微软雅黑"/>
+                <a:cs typeface="微软雅黑"/>
+              </a:rPr>
+              <a:t>文化解码法</a:t>
+            </a:r>
+          </a:p>
+        </p:txBody>
+      </p:sp>
+      <p:sp>
+        <p:nvSpPr>
+          <p:cNvPr id="10" name="TextBox 9"/>
+          <p:cNvSpPr txBox="1"/>
+          <p:nvPr/>
+        </p:nvSpPr>
+        <p:spPr>
+          <a:xfrm>
+            <a:off x="1371600" y="2852928"/>
+            <a:ext cx="1539163" cy="2880360"/>
+          </a:xfrm>
+          <a:prstGeom prst="rect">
+            <a:avLst/>
+          </a:prstGeom>
+          <a:noFill/>
+        </p:spPr>
+        <p:txBody>
+          <a:bodyPr wrap="square" anchor="t" lIns="0" rIns="0" tIns="0" bIns="0">
+            <a:spAutoFit/>
+          </a:bodyPr>
+          <a:lstStyle/>
+          <a:p>
+            <a:pPr algn="l">
+              <a:lnSpc>
+                <a:spcPct val="140000"/>
+              </a:lnSpc>
+              <a:spcAft>
+                <a:spcPts val="400"/>
+              </a:spcAft>
+            </a:pPr>
+            <a:r>
+              <a:rPr sz="1400" b="0">
+                <a:solidFill>
+                  <a:srgbClr val="1C2A33"/>
+                </a:solidFill>
+                <a:latin typeface="楷体"/>
+                <a:ea typeface="楷体"/>
+                <a:cs typeface="楷体"/>
+              </a:rPr>
+              <a:t>词→念。</a:t>
+            </a:r>
+          </a:p>
+        </p:txBody>
+      </p:sp>
+      <p:sp>
+        <p:nvSpPr>
+          <p:cNvPr id="11" name="Rounded Rectangle 10"/>
+          <p:cNvSpPr/>
+          <p:nvPr/>
+        </p:nvSpPr>
+        <p:spPr>
+          <a:xfrm>
+            <a:off x="3459403" y="2194560"/>
+            <a:ext cx="2453563" cy="3657600"/>
           </a:xfrm>
           <a:prstGeom prst="roundRect">
             <a:avLst/>
@@ -5622,13 +6183,13 @@
       </p:sp>
       <p:sp>
         <p:nvSpPr>
-          <p:cNvPr id="6" name="Oval 5"/>
+          <p:cNvPr id="12" name="Oval 11"/>
           <p:cNvSpPr/>
           <p:nvPr/>
         </p:nvSpPr>
         <p:spPr>
           <a:xfrm>
-            <a:off x="804672" y="1536192"/>
+            <a:off x="3623995" y="2359152"/>
             <a:ext cx="457200" cy="457200"/>
           </a:xfrm>
           <a:prstGeom prst="ellipse">
@@ -5666,13 +6227,13 @@
       </p:sp>
       <p:sp>
         <p:nvSpPr>
-          <p:cNvPr id="7" name="TextBox 6"/>
+          <p:cNvPr id="13" name="TextBox 12"/>
           <p:cNvSpPr txBox="1"/>
           <p:nvPr/>
         </p:nvSpPr>
         <p:spPr>
           <a:xfrm>
-            <a:off x="804672" y="1591056"/>
+            <a:off x="3623995" y="2414016"/>
             <a:ext cx="457200" cy="384048"/>
           </a:xfrm>
           <a:prstGeom prst="rect">
@@ -5696,21 +6257,21 @@
                 <a:ea typeface="微软雅黑"/>
                 <a:cs typeface="微软雅黑"/>
               </a:rPr>
-              <a:t>1</a:t>
-            </a:r>
-          </a:p>
-        </p:txBody>
-      </p:sp>
-      <p:sp>
-        <p:nvSpPr>
-          <p:cNvPr id="8" name="TextBox 7"/>
+              <a:t>2</a:t>
+            </a:r>
+          </a:p>
+        </p:txBody>
+      </p:sp>
+      <p:sp>
+        <p:nvSpPr>
+          <p:cNvPr id="14" name="TextBox 13"/>
           <p:cNvSpPr txBox="1"/>
           <p:nvPr/>
         </p:nvSpPr>
         <p:spPr>
           <a:xfrm>
-            <a:off x="1371600" y="1481328"/>
-            <a:ext cx="9997135" cy="484632"/>
+            <a:off x="4190923" y="2359152"/>
+            <a:ext cx="1539163" cy="457200"/>
           </a:xfrm>
           <a:prstGeom prst="rect">
             <a:avLst/>
@@ -5723,13 +6284,9 @@
           </a:bodyPr>
           <a:lstStyle/>
           <a:p>
-            <a:pPr algn="l">
-              <a:lnSpc>
-                <a:spcPct val="110000"/>
-              </a:lnSpc>
-            </a:pPr>
-            <a:r>
-              <a:rPr sz="1600" b="1">
+            <a:pPr algn="l"/>
+            <a:r>
+              <a:rPr sz="1700" b="1">
                 <a:solidFill>
                   <a:srgbClr val="1C2A33"/>
                 </a:solidFill>
@@ -5737,21 +6294,65 @@
                 <a:ea typeface="微软雅黑"/>
                 <a:cs typeface="微软雅黑"/>
               </a:rPr>
-              <a:t>Step 1 导入</a:t>
-            </a:r>
-          </a:p>
-        </p:txBody>
-      </p:sp>
-      <p:sp>
-        <p:nvSpPr>
-          <p:cNvPr id="9" name="Rounded Rectangle 8"/>
+              <a:t>归类法</a:t>
+            </a:r>
+          </a:p>
+        </p:txBody>
+      </p:sp>
+      <p:sp>
+        <p:nvSpPr>
+          <p:cNvPr id="15" name="TextBox 14"/>
+          <p:cNvSpPr txBox="1"/>
+          <p:nvPr/>
+        </p:nvSpPr>
+        <p:spPr>
+          <a:xfrm>
+            <a:off x="4190923" y="2852928"/>
+            <a:ext cx="1539163" cy="2880360"/>
+          </a:xfrm>
+          <a:prstGeom prst="rect">
+            <a:avLst/>
+          </a:prstGeom>
+          <a:noFill/>
+        </p:spPr>
+        <p:txBody>
+          <a:bodyPr wrap="square" anchor="t" lIns="0" rIns="0" tIns="0" bIns="0">
+            <a:spAutoFit/>
+          </a:bodyPr>
+          <a:lstStyle/>
+          <a:p>
+            <a:pPr algn="l">
+              <a:lnSpc>
+                <a:spcPct val="140000"/>
+              </a:lnSpc>
+              <a:spcAft>
+                <a:spcPts val="400"/>
+              </a:spcAft>
+            </a:pPr>
+            <a:r>
+              <a:rPr sz="1400" b="0">
+                <a:solidFill>
+                  <a:srgbClr val="1C2A33"/>
+                </a:solidFill>
+                <a:latin typeface="楷体"/>
+                <a:ea typeface="楷体"/>
+                <a:cs typeface="楷体"/>
+              </a:rPr>
+              <a:t>修养/称谓/科举/时间。</a:t>
+            </a:r>
+          </a:p>
+        </p:txBody>
+      </p:sp>
+      <p:sp>
+        <p:nvSpPr>
+          <p:cNvPr id="16" name="Rounded Rectangle 15"/>
           <p:cNvSpPr/>
           <p:nvPr/>
         </p:nvSpPr>
         <p:spPr>
           <a:xfrm>
-            <a:off x="640080" y="2194560"/>
-            <a:ext cx="10911535" cy="685800"/>
+            <a:off x="6278727" y="2194560"/>
+            <a:ext cx="2453563" cy="3657600"/>
           </a:xfrm>
           <a:prstGeom prst="roundRect">
             <a:avLst/>
@@ -5761,7 +6362,7 @@
           </a:solidFill>
           <a:ln w="22860">
             <a:solidFill>
-              <a:srgbClr val="2E7D6B"/>
+              <a:srgbClr val="C8A86B"/>
             </a:solidFill>
           </a:ln>
           <a:effectLst/>
@@ -5790,20 +6391,20 @@
       </p:sp>
       <p:sp>
         <p:nvSpPr>
-          <p:cNvPr id="10" name="Oval 9"/>
+          <p:cNvPr id="17" name="Oval 16"/>
           <p:cNvSpPr/>
           <p:nvPr/>
         </p:nvSpPr>
         <p:spPr>
           <a:xfrm>
-            <a:off x="804672" y="2359152"/>
+            <a:off x="6443319" y="2359152"/>
             <a:ext cx="457200" cy="457200"/>
           </a:xfrm>
           <a:prstGeom prst="ellipse">
             <a:avLst/>
           </a:prstGeom>
           <a:solidFill>
-            <a:srgbClr val="2E7D6B"/>
+            <a:srgbClr val="C8A86B"/>
           </a:solidFill>
           <a:ln>
             <a:noFill/>
@@ -5834,13 +6435,13 @@
       </p:sp>
       <p:sp>
         <p:nvSpPr>
-          <p:cNvPr id="11" name="TextBox 10"/>
+          <p:cNvPr id="18" name="TextBox 17"/>
           <p:cNvSpPr txBox="1"/>
           <p:nvPr/>
         </p:nvSpPr>
         <p:spPr>
           <a:xfrm>
-            <a:off x="804672" y="2414016"/>
+            <a:off x="6443319" y="2414016"/>
             <a:ext cx="457200" cy="384048"/>
           </a:xfrm>
           <a:prstGeom prst="rect">
@@ -5864,21 +6465,21 @@
                 <a:ea typeface="微软雅黑"/>
                 <a:cs typeface="微软雅黑"/>
               </a:rPr>
-              <a:t>2</a:t>
-            </a:r>
-          </a:p>
-        </p:txBody>
-      </p:sp>
-      <p:sp>
-        <p:nvSpPr>
-          <p:cNvPr id="12" name="TextBox 11"/>
+              <a:t>3</a:t>
+            </a:r>
+          </a:p>
+        </p:txBody>
+      </p:sp>
+      <p:sp>
+        <p:nvSpPr>
+          <p:cNvPr id="19" name="TextBox 18"/>
           <p:cNvSpPr txBox="1"/>
           <p:nvPr/>
         </p:nvSpPr>
         <p:spPr>
           <a:xfrm>
-            <a:off x="1371600" y="2304288"/>
-            <a:ext cx="9997135" cy="484632"/>
+            <a:off x="7010247" y="2359152"/>
+            <a:ext cx="1539163" cy="457200"/>
           </a:xfrm>
           <a:prstGeom prst="rect">
             <a:avLst/>
@@ -5891,13 +6492,9 @@
           </a:bodyPr>
           <a:lstStyle/>
           <a:p>
-            <a:pPr algn="l">
-              <a:lnSpc>
-                <a:spcPct val="110000"/>
-              </a:lnSpc>
-            </a:pPr>
-            <a:r>
-              <a:rPr sz="1600" b="1">
+            <a:pPr algn="l"/>
+            <a:r>
+              <a:rPr sz="1700" b="1">
                 <a:solidFill>
                   <a:srgbClr val="1C2A33"/>
                 </a:solidFill>
@@ -5905,21 +6502,65 @@
                 <a:ea typeface="微软雅黑"/>
                 <a:cs typeface="微软雅黑"/>
               </a:rPr>
-              <a:t>Step 2 修养与称谓</a:t>
-            </a:r>
-          </a:p>
-        </p:txBody>
-      </p:sp>
-      <p:sp>
-        <p:nvSpPr>
-          <p:cNvPr id="13" name="Rounded Rectangle 12"/>
+              <a:t>联今法</a:t>
+            </a:r>
+          </a:p>
+        </p:txBody>
+      </p:sp>
+      <p:sp>
+        <p:nvSpPr>
+          <p:cNvPr id="20" name="TextBox 19"/>
+          <p:cNvSpPr txBox="1"/>
+          <p:nvPr/>
+        </p:nvSpPr>
+        <p:spPr>
+          <a:xfrm>
+            <a:off x="7010247" y="2852928"/>
+            <a:ext cx="1539163" cy="2880360"/>
+          </a:xfrm>
+          <a:prstGeom prst="rect">
+            <a:avLst/>
+          </a:prstGeom>
+          <a:noFill/>
+        </p:spPr>
+        <p:txBody>
+          <a:bodyPr wrap="square" anchor="t" lIns="0" rIns="0" tIns="0" bIns="0">
+            <a:spAutoFit/>
+          </a:bodyPr>
+          <a:lstStyle/>
+          <a:p>
+            <a:pPr algn="l">
+              <a:lnSpc>
+                <a:spcPct val="140000"/>
+              </a:lnSpc>
+              <a:spcAft>
+                <a:spcPts val="400"/>
+              </a:spcAft>
+            </a:pPr>
+            <a:r>
+              <a:rPr sz="1400" b="0">
+                <a:solidFill>
+                  <a:srgbClr val="1C2A33"/>
+                </a:solidFill>
+                <a:latin typeface="楷体"/>
+                <a:ea typeface="楷体"/>
+                <a:cs typeface="楷体"/>
+              </a:rPr>
+              <a:t>今语存古念。</a:t>
+            </a:r>
+          </a:p>
+        </p:txBody>
+      </p:sp>
+      <p:sp>
+        <p:nvSpPr>
+          <p:cNvPr id="21" name="Rounded Rectangle 20"/>
           <p:cNvSpPr/>
           <p:nvPr/>
         </p:nvSpPr>
         <p:spPr>
           <a:xfrm>
-            <a:off x="640080" y="3017520"/>
-            <a:ext cx="10911535" cy="685800"/>
+            <a:off x="9098051" y="2194560"/>
+            <a:ext cx="2453563" cy="3657600"/>
           </a:xfrm>
           <a:prstGeom prst="roundRect">
             <a:avLst/>
@@ -5929,7 +6570,7 @@
           </a:solidFill>
           <a:ln w="22860">
             <a:solidFill>
-              <a:srgbClr val="2E7D6B"/>
+              <a:srgbClr val="6B6258"/>
             </a:solidFill>
           </a:ln>
           <a:effectLst/>
@@ -5958,20 +6599,20 @@
       </p:sp>
       <p:sp>
         <p:nvSpPr>
-          <p:cNvPr id="14" name="Oval 13"/>
+          <p:cNvPr id="22" name="Oval 21"/>
           <p:cNvSpPr/>
           <p:nvPr/>
         </p:nvSpPr>
         <p:spPr>
           <a:xfrm>
-            <a:off x="804672" y="3182112"/>
+            <a:off x="9262643" y="2359152"/>
             <a:ext cx="457200" cy="457200"/>
           </a:xfrm>
           <a:prstGeom prst="ellipse">
             <a:avLst/>
           </a:prstGeom>
           <a:solidFill>
-            <a:srgbClr val="2E7D6B"/>
+            <a:srgbClr val="6B6258"/>
           </a:solidFill>
           <a:ln>
             <a:noFill/>
@@ -6002,181 +6643,13 @@
       </p:sp>
       <p:sp>
         <p:nvSpPr>
-          <p:cNvPr id="15" name="TextBox 14"/>
+          <p:cNvPr id="23" name="TextBox 22"/>
           <p:cNvSpPr txBox="1"/>
           <p:nvPr/>
         </p:nvSpPr>
         <p:spPr>
           <a:xfrm>
-            <a:off x="804672" y="3236976"/>
-            <a:ext cx="457200" cy="384048"/>
-          </a:xfrm>
-          <a:prstGeom prst="rect">
-            <a:avLst/>
-          </a:prstGeom>
-          <a:noFill/>
-        </p:spPr>
-        <p:txBody>
-          <a:bodyPr wrap="square" anchor="t" lIns="0" rIns="0" tIns="0" bIns="0">
-            <a:spAutoFit/>
-          </a:bodyPr>
-          <a:lstStyle/>
-          <a:p>
-            <a:pPr algn="ctr"/>
-            <a:r>
-              <a:rPr sz="1600" b="1">
-                <a:solidFill>
-                  <a:srgbClr val="FFFFFF"/>
-                </a:solidFill>
-                <a:latin typeface="微软雅黑"/>
-                <a:ea typeface="微软雅黑"/>
-                <a:cs typeface="微软雅黑"/>
-              </a:rPr>
-              <a:t>3</a:t>
-            </a:r>
-          </a:p>
-        </p:txBody>
-      </p:sp>
-      <p:sp>
-        <p:nvSpPr>
-          <p:cNvPr id="16" name="TextBox 15"/>
-          <p:cNvSpPr txBox="1"/>
-          <p:nvPr/>
-        </p:nvSpPr>
-        <p:spPr>
-          <a:xfrm>
-            <a:off x="1371600" y="3127248"/>
-            <a:ext cx="9997135" cy="484632"/>
-          </a:xfrm>
-          <a:prstGeom prst="rect">
-            <a:avLst/>
-          </a:prstGeom>
-          <a:noFill/>
-        </p:spPr>
-        <p:txBody>
-          <a:bodyPr wrap="square" anchor="t" lIns="0" rIns="0" tIns="0" bIns="0">
-            <a:spAutoFit/>
-          </a:bodyPr>
-          <a:lstStyle/>
-          <a:p>
-            <a:pPr algn="l">
-              <a:lnSpc>
-                <a:spcPct val="110000"/>
-              </a:lnSpc>
-            </a:pPr>
-            <a:r>
-              <a:rPr sz="1600" b="1">
-                <a:solidFill>
-                  <a:srgbClr val="1C2A33"/>
-                </a:solidFill>
-                <a:latin typeface="微软雅黑"/>
-                <a:ea typeface="微软雅黑"/>
-                <a:cs typeface="微软雅黑"/>
-              </a:rPr>
-              <a:t>Step 3 科举与时间</a:t>
-            </a:r>
-          </a:p>
-        </p:txBody>
-      </p:sp>
-      <p:sp>
-        <p:nvSpPr>
-          <p:cNvPr id="17" name="Rounded Rectangle 16"/>
-          <p:cNvSpPr/>
-          <p:nvPr/>
-        </p:nvSpPr>
-        <p:spPr>
-          <a:xfrm>
-            <a:off x="640080" y="3840480"/>
-            <a:ext cx="10911535" cy="685800"/>
-          </a:xfrm>
-          <a:prstGeom prst="roundRect">
-            <a:avLst/>
-          </a:prstGeom>
-          <a:solidFill>
-            <a:srgbClr val="FFFFFF"/>
-          </a:solidFill>
-          <a:ln w="22860">
-            <a:solidFill>
-              <a:srgbClr val="2E7D6B"/>
-            </a:solidFill>
-          </a:ln>
-          <a:effectLst/>
-        </p:spPr>
-        <p:style>
-          <a:lnRef idx="1">
-            <a:schemeClr val="accent1"/>
-          </a:lnRef>
-          <a:fillRef idx="3">
-            <a:schemeClr val="accent1"/>
-          </a:fillRef>
-          <a:effectRef idx="2">
-            <a:schemeClr val="accent1"/>
-          </a:effectRef>
-          <a:fontRef idx="minor">
-            <a:schemeClr val="lt1"/>
-          </a:fontRef>
-        </p:style>
-        <p:txBody>
-          <a:bodyPr rtlCol="0" anchor="ctr"/>
-          <a:lstStyle/>
-          <a:p>
-            <a:pPr algn="ctr"/>
-          </a:p>
-        </p:txBody>
-      </p:sp>
-      <p:sp>
-        <p:nvSpPr>
-          <p:cNvPr id="18" name="Oval 17"/>
-          <p:cNvSpPr/>
-          <p:nvPr/>
-        </p:nvSpPr>
-        <p:spPr>
-          <a:xfrm>
-            <a:off x="804672" y="4005072"/>
-            <a:ext cx="457200" cy="457200"/>
-          </a:xfrm>
-          <a:prstGeom prst="ellipse">
-            <a:avLst/>
-          </a:prstGeom>
-          <a:solidFill>
-            <a:srgbClr val="2E7D6B"/>
-          </a:solidFill>
-          <a:ln>
-            <a:noFill/>
-          </a:ln>
-          <a:effectLst/>
-        </p:spPr>
-        <p:style>
-          <a:lnRef idx="1">
-            <a:schemeClr val="accent1"/>
-          </a:lnRef>
-          <a:fillRef idx="3">
-            <a:schemeClr val="accent1"/>
-          </a:fillRef>
-          <a:effectRef idx="2">
-            <a:schemeClr val="accent1"/>
-          </a:effectRef>
-          <a:fontRef idx="minor">
-            <a:schemeClr val="lt1"/>
-          </a:fontRef>
-        </p:style>
-        <p:txBody>
-          <a:bodyPr rtlCol="0" anchor="ctr"/>
-          <a:lstStyle/>
-          <a:p>
-            <a:pPr algn="ctr"/>
-          </a:p>
-        </p:txBody>
-      </p:sp>
-      <p:sp>
-        <p:nvSpPr>
-          <p:cNvPr id="19" name="TextBox 18"/>
-          <p:cNvSpPr txBox="1"/>
-          <p:nvPr/>
-        </p:nvSpPr>
-        <p:spPr>
-          <a:xfrm>
-            <a:off x="804672" y="4059936"/>
+            <a:off x="9262643" y="2414016"/>
             <a:ext cx="457200" cy="384048"/>
           </a:xfrm>
           <a:prstGeom prst="rect">
@@ -6207,14 +6680,14 @@
       </p:sp>
       <p:sp>
         <p:nvSpPr>
-          <p:cNvPr id="20" name="TextBox 19"/>
+          <p:cNvPr id="24" name="TextBox 23"/>
           <p:cNvSpPr txBox="1"/>
           <p:nvPr/>
         </p:nvSpPr>
         <p:spPr>
           <a:xfrm>
-            <a:off x="1371600" y="3950208"/>
-            <a:ext cx="9997135" cy="484632"/>
+            <a:off x="9829571" y="2359152"/>
+            <a:ext cx="1539163" cy="457200"/>
           </a:xfrm>
           <a:prstGeom prst="rect">
             <a:avLst/>
@@ -6227,13 +6700,9 @@
           </a:bodyPr>
           <a:lstStyle/>
           <a:p>
-            <a:pPr algn="l">
-              <a:lnSpc>
-                <a:spcPct val="110000"/>
-              </a:lnSpc>
-            </a:pPr>
-            <a:r>
-              <a:rPr sz="1600" b="1">
+            <a:pPr algn="l"/>
+            <a:r>
+              <a:rPr sz="1700" b="1">
                 <a:solidFill>
                   <a:srgbClr val="1C2A33"/>
                 </a:solidFill>
@@ -6241,111 +6710,21 @@
                 <a:ea typeface="微软雅黑"/>
                 <a:cs typeface="微软雅黑"/>
               </a:rPr>
-              <a:t>Step 4 联今</a:t>
-            </a:r>
-          </a:p>
-        </p:txBody>
-      </p:sp>
-      <p:sp>
-        <p:nvSpPr>
-          <p:cNvPr id="21" name="Rounded Rectangle 20"/>
-          <p:cNvSpPr/>
-          <p:nvPr/>
-        </p:nvSpPr>
-        <p:spPr>
-          <a:xfrm>
-            <a:off x="640080" y="4663440"/>
-            <a:ext cx="10911535" cy="685800"/>
-          </a:xfrm>
-          <a:prstGeom prst="roundRect">
-            <a:avLst/>
-          </a:prstGeom>
-          <a:solidFill>
-            <a:srgbClr val="FFFFFF"/>
-          </a:solidFill>
-          <a:ln w="22860">
-            <a:solidFill>
-              <a:srgbClr val="2E7D6B"/>
-            </a:solidFill>
-          </a:ln>
-          <a:effectLst/>
-        </p:spPr>
-        <p:style>
-          <a:lnRef idx="1">
-            <a:schemeClr val="accent1"/>
-          </a:lnRef>
-          <a:fillRef idx="3">
-            <a:schemeClr val="accent1"/>
-          </a:fillRef>
-          <a:effectRef idx="2">
-            <a:schemeClr val="accent1"/>
-          </a:effectRef>
-          <a:fontRef idx="minor">
-            <a:schemeClr val="lt1"/>
-          </a:fontRef>
-        </p:style>
-        <p:txBody>
-          <a:bodyPr rtlCol="0" anchor="ctr"/>
-          <a:lstStyle/>
-          <a:p>
-            <a:pPr algn="ctr"/>
-          </a:p>
-        </p:txBody>
-      </p:sp>
-      <p:sp>
-        <p:nvSpPr>
-          <p:cNvPr id="22" name="Oval 21"/>
-          <p:cNvSpPr/>
-          <p:nvPr/>
-        </p:nvSpPr>
-        <p:spPr>
-          <a:xfrm>
-            <a:off x="804672" y="4828032"/>
-            <a:ext cx="457200" cy="457200"/>
-          </a:xfrm>
-          <a:prstGeom prst="ellipse">
-            <a:avLst/>
-          </a:prstGeom>
-          <a:solidFill>
-            <a:srgbClr val="2E7D6B"/>
-          </a:solidFill>
-          <a:ln>
-            <a:noFill/>
-          </a:ln>
-          <a:effectLst/>
-        </p:spPr>
-        <p:style>
-          <a:lnRef idx="1">
-            <a:schemeClr val="accent1"/>
-          </a:lnRef>
-          <a:fillRef idx="3">
-            <a:schemeClr val="accent1"/>
-          </a:fillRef>
-          <a:effectRef idx="2">
-            <a:schemeClr val="accent1"/>
-          </a:effectRef>
-          <a:fontRef idx="minor">
-            <a:schemeClr val="lt1"/>
-          </a:fontRef>
-        </p:style>
-        <p:txBody>
-          <a:bodyPr rtlCol="0" anchor="ctr"/>
-          <a:lstStyle/>
-          <a:p>
-            <a:pPr algn="ctr"/>
-          </a:p>
-        </p:txBody>
-      </p:sp>
-      <p:sp>
-        <p:nvSpPr>
-          <p:cNvPr id="23" name="TextBox 22"/>
+              <a:t>讨论法。</a:t>
+            </a:r>
+          </a:p>
+        </p:txBody>
+      </p:sp>
+      <p:sp>
+        <p:nvSpPr>
+          <p:cNvPr id="25" name="TextBox 24"/>
           <p:cNvSpPr txBox="1"/>
           <p:nvPr/>
         </p:nvSpPr>
         <p:spPr>
           <a:xfrm>
-            <a:off x="804672" y="4882896"/>
-            <a:ext cx="457200" cy="384048"/>
+            <a:off x="9829571" y="2852928"/>
+            <a:ext cx="1539163" cy="2880360"/>
           </a:xfrm>
           <a:prstGeom prst="rect">
             <a:avLst/>
@@ -6358,233 +6737,31 @@
           </a:bodyPr>
           <a:lstStyle/>
           <a:p>
-            <a:pPr algn="ctr"/>
-            <a:r>
-              <a:rPr sz="1600" b="1">
-                <a:solidFill>
-                  <a:srgbClr val="FFFFFF"/>
-                </a:solidFill>
-                <a:latin typeface="微软雅黑"/>
-                <a:ea typeface="微软雅黑"/>
-                <a:cs typeface="微软雅黑"/>
-              </a:rPr>
-              <a:t>5</a:t>
-            </a:r>
-          </a:p>
-        </p:txBody>
-      </p:sp>
-      <p:sp>
-        <p:nvSpPr>
-          <p:cNvPr id="24" name="TextBox 23"/>
-          <p:cNvSpPr txBox="1"/>
-          <p:nvPr/>
-        </p:nvSpPr>
-        <p:spPr>
-          <a:xfrm>
-            <a:off x="1371600" y="4773168"/>
-            <a:ext cx="9997135" cy="484632"/>
-          </a:xfrm>
-          <a:prstGeom prst="rect">
-            <a:avLst/>
-          </a:prstGeom>
-          <a:noFill/>
-        </p:spPr>
-        <p:txBody>
-          <a:bodyPr wrap="square" anchor="t" lIns="0" rIns="0" tIns="0" bIns="0">
-            <a:spAutoFit/>
-          </a:bodyPr>
-          <a:lstStyle/>
-          <a:p>
             <a:pPr algn="l">
               <a:lnSpc>
-                <a:spcPct val="110000"/>
+                <a:spcPct val="140000"/>
               </a:lnSpc>
+              <a:spcAft>
+                <a:spcPts val="400"/>
+              </a:spcAft>
             </a:pPr>
             <a:r>
-              <a:rPr sz="1600" b="1">
+              <a:rPr sz="1400" b="0">
                 <a:solidFill>
                   <a:srgbClr val="1C2A33"/>
                 </a:solidFill>
-                <a:latin typeface="微软雅黑"/>
-                <a:ea typeface="微软雅黑"/>
-                <a:cs typeface="微软雅黑"/>
+                <a:latin typeface="楷体"/>
+                <a:ea typeface="楷体"/>
+                <a:cs typeface="楷体"/>
               </a:rPr>
-              <a:t>Step 5 讨论</a:t>
-            </a:r>
-          </a:p>
-        </p:txBody>
-      </p:sp>
-      <p:sp>
-        <p:nvSpPr>
-          <p:cNvPr id="25" name="Rounded Rectangle 24"/>
-          <p:cNvSpPr/>
-          <p:nvPr/>
-        </p:nvSpPr>
-        <p:spPr>
-          <a:xfrm>
-            <a:off x="640080" y="5486400"/>
-            <a:ext cx="10911535" cy="685800"/>
-          </a:xfrm>
-          <a:prstGeom prst="roundRect">
-            <a:avLst/>
-          </a:prstGeom>
-          <a:solidFill>
-            <a:srgbClr val="FFFFFF"/>
-          </a:solidFill>
-          <a:ln w="22860">
-            <a:solidFill>
-              <a:srgbClr val="2E7D6B"/>
-            </a:solidFill>
-          </a:ln>
-          <a:effectLst/>
-        </p:spPr>
-        <p:style>
-          <a:lnRef idx="1">
-            <a:schemeClr val="accent1"/>
-          </a:lnRef>
-          <a:fillRef idx="3">
-            <a:schemeClr val="accent1"/>
-          </a:fillRef>
-          <a:effectRef idx="2">
-            <a:schemeClr val="accent1"/>
-          </a:effectRef>
-          <a:fontRef idx="minor">
-            <a:schemeClr val="lt1"/>
-          </a:fontRef>
-        </p:style>
-        <p:txBody>
-          <a:bodyPr rtlCol="0" anchor="ctr"/>
-          <a:lstStyle/>
-          <a:p>
-            <a:pPr algn="ctr"/>
-          </a:p>
-        </p:txBody>
-      </p:sp>
-      <p:sp>
-        <p:nvSpPr>
-          <p:cNvPr id="26" name="Oval 25"/>
-          <p:cNvSpPr/>
-          <p:nvPr/>
-        </p:nvSpPr>
-        <p:spPr>
-          <a:xfrm>
-            <a:off x="804672" y="5650992"/>
-            <a:ext cx="457200" cy="457200"/>
-          </a:xfrm>
-          <a:prstGeom prst="ellipse">
-            <a:avLst/>
-          </a:prstGeom>
-          <a:solidFill>
-            <a:srgbClr val="2E7D6B"/>
-          </a:solidFill>
-          <a:ln>
-            <a:noFill/>
-          </a:ln>
-          <a:effectLst/>
-        </p:spPr>
-        <p:style>
-          <a:lnRef idx="1">
-            <a:schemeClr val="accent1"/>
-          </a:lnRef>
-          <a:fillRef idx="3">
-            <a:schemeClr val="accent1"/>
-          </a:fillRef>
-          <a:effectRef idx="2">
-            <a:schemeClr val="accent1"/>
-          </a:effectRef>
-          <a:fontRef idx="minor">
-            <a:schemeClr val="lt1"/>
-          </a:fontRef>
-        </p:style>
-        <p:txBody>
-          <a:bodyPr rtlCol="0" anchor="ctr"/>
-          <a:lstStyle/>
-          <a:p>
-            <a:pPr algn="ctr"/>
-          </a:p>
-        </p:txBody>
-      </p:sp>
-      <p:sp>
-        <p:nvSpPr>
-          <p:cNvPr id="27" name="TextBox 26"/>
-          <p:cNvSpPr txBox="1"/>
-          <p:nvPr/>
-        </p:nvSpPr>
-        <p:spPr>
-          <a:xfrm>
-            <a:off x="804672" y="5705856"/>
-            <a:ext cx="457200" cy="384048"/>
-          </a:xfrm>
-          <a:prstGeom prst="rect">
-            <a:avLst/>
-          </a:prstGeom>
-          <a:noFill/>
-        </p:spPr>
-        <p:txBody>
-          <a:bodyPr wrap="square" anchor="t" lIns="0" rIns="0" tIns="0" bIns="0">
-            <a:spAutoFit/>
-          </a:bodyPr>
-          <a:lstStyle/>
-          <a:p>
-            <a:pPr algn="ctr"/>
-            <a:r>
-              <a:rPr sz="1600" b="1">
-                <a:solidFill>
-                  <a:srgbClr val="FFFFFF"/>
-                </a:solidFill>
-                <a:latin typeface="微软雅黑"/>
-                <a:ea typeface="微软雅黑"/>
-                <a:cs typeface="微软雅黑"/>
-              </a:rPr>
-              <a:t>6</a:t>
-            </a:r>
-          </a:p>
-        </p:txBody>
-      </p:sp>
-      <p:sp>
-        <p:nvSpPr>
-          <p:cNvPr id="28" name="TextBox 27"/>
-          <p:cNvSpPr txBox="1"/>
-          <p:nvPr/>
-        </p:nvSpPr>
-        <p:spPr>
-          <a:xfrm>
-            <a:off x="1371600" y="5596128"/>
-            <a:ext cx="9997135" cy="484632"/>
-          </a:xfrm>
-          <a:prstGeom prst="rect">
-            <a:avLst/>
-          </a:prstGeom>
-          <a:noFill/>
-        </p:spPr>
-        <p:txBody>
-          <a:bodyPr wrap="square" anchor="t" lIns="0" rIns="0" tIns="0" bIns="0">
-            <a:spAutoFit/>
-          </a:bodyPr>
-          <a:lstStyle/>
-          <a:p>
-            <a:pPr algn="l">
-              <a:lnSpc>
-                <a:spcPct val="110000"/>
-              </a:lnSpc>
-            </a:pPr>
-            <a:r>
-              <a:rPr sz="1600" b="1">
-                <a:solidFill>
-                  <a:srgbClr val="1C2A33"/>
-                </a:solidFill>
-                <a:latin typeface="微软雅黑"/>
-                <a:ea typeface="微软雅黑"/>
-                <a:cs typeface="微软雅黑"/>
-              </a:rPr>
-              <a:t>Step 6 小结+作业</a:t>
-            </a:r>
-          </a:p>
-        </p:txBody>
-      </p:sp>
-      <p:sp>
-        <p:nvSpPr>
-          <p:cNvPr id="29" name="TextBox 28"/>
+              <a:t/>
+            </a:r>
+          </a:p>
+        </p:txBody>
+      </p:sp>
+      <p:sp>
+        <p:nvSpPr>
+          <p:cNvPr id="26" name="TextBox 25"/>
           <p:cNvSpPr txBox="1"/>
           <p:nvPr/>
         </p:nvSpPr>
@@ -6717,7 +6894,7 @@
                 <a:ea typeface="微软雅黑"/>
                 <a:cs typeface="微软雅黑"/>
               </a:rPr>
-              <a:t>易混易错</a:t>
+              <a:t>难点</a:t>
             </a:r>
           </a:p>
         </p:txBody>
@@ -6768,14 +6945,51 @@
       </p:sp>
       <p:sp>
         <p:nvSpPr>
-          <p:cNvPr id="5" name="Rounded Rectangle 4"/>
+          <p:cNvPr id="5" name="TextBox 4"/>
+          <p:cNvSpPr txBox="1"/>
+          <p:nvPr/>
+        </p:nvSpPr>
+        <p:spPr>
+          <a:xfrm>
+            <a:off x="640080" y="1325880"/>
+            <a:ext cx="10058400" cy="640080"/>
+          </a:xfrm>
+          <a:prstGeom prst="rect">
+            <a:avLst/>
+          </a:prstGeom>
+          <a:noFill/>
+        </p:spPr>
+        <p:txBody>
+          <a:bodyPr wrap="square" anchor="t" lIns="0" rIns="0" tIns="0" bIns="0">
+            <a:spAutoFit/>
+          </a:bodyPr>
+          <a:lstStyle/>
+          <a:p>
+            <a:pPr algn="l"/>
+            <a:r>
+              <a:rPr sz="3000" b="1">
+                <a:solidFill>
+                  <a:srgbClr val="1C2A33"/>
+                </a:solidFill>
+                <a:latin typeface="楷体"/>
+                <a:ea typeface="楷体"/>
+                <a:cs typeface="楷体"/>
+              </a:rPr>
+              <a:t>本课难点</a:t>
+            </a:r>
+          </a:p>
+        </p:txBody>
+      </p:sp>
+      <p:sp>
+        <p:nvSpPr>
+          <p:cNvPr id="6" name="Rounded Rectangle 5"/>
           <p:cNvSpPr/>
           <p:nvPr/>
         </p:nvSpPr>
         <p:spPr>
           <a:xfrm>
-            <a:off x="640080" y="1417320"/>
-            <a:ext cx="5349240" cy="2057400"/>
+            <a:off x="640080" y="2194560"/>
+            <a:ext cx="3393338" cy="3931920"/>
           </a:xfrm>
           <a:prstGeom prst="roundRect">
             <a:avLst/>
@@ -6783,7 +6997,7 @@
           <a:solidFill>
             <a:srgbClr val="FFFFFF"/>
           </a:solidFill>
-          <a:ln w="22860">
+          <a:ln w="20320">
             <a:solidFill>
               <a:srgbClr val="B23A2A"/>
             </a:solidFill>
@@ -6814,16 +7028,16 @@
       </p:sp>
       <p:sp>
         <p:nvSpPr>
-          <p:cNvPr id="6" name="Oval 5"/>
+          <p:cNvPr id="7" name="Rectangle 6"/>
           <p:cNvSpPr/>
           <p:nvPr/>
         </p:nvSpPr>
         <p:spPr>
           <a:xfrm>
-            <a:off x="804672" y="1581912"/>
-            <a:ext cx="457200" cy="457200"/>
-          </a:xfrm>
-          <a:prstGeom prst="ellipse">
+            <a:off x="640080" y="2194560"/>
+            <a:ext cx="3393338" cy="548640"/>
+          </a:xfrm>
+          <a:prstGeom prst="rect">
             <a:avLst/>
           </a:prstGeom>
           <a:solidFill>
@@ -6858,14 +7072,14 @@
       </p:sp>
       <p:sp>
         <p:nvSpPr>
-          <p:cNvPr id="7" name="TextBox 6"/>
+          <p:cNvPr id="8" name="TextBox 7"/>
           <p:cNvSpPr txBox="1"/>
           <p:nvPr/>
         </p:nvSpPr>
         <p:spPr>
           <a:xfrm>
-            <a:off x="804672" y="1636776"/>
-            <a:ext cx="457200" cy="384048"/>
+            <a:off x="640080" y="2304288"/>
+            <a:ext cx="3393338" cy="365760"/>
           </a:xfrm>
           <a:prstGeom prst="rect">
             <a:avLst/>
@@ -6880,7 +7094,7 @@
           <a:p>
             <a:pPr algn="ctr"/>
             <a:r>
-              <a:rPr sz="1600" b="1">
+              <a:rPr sz="1500" b="1">
                 <a:solidFill>
                   <a:srgbClr val="FFFFFF"/>
                 </a:solidFill>
@@ -6888,21 +7102,21 @@
                 <a:ea typeface="微软雅黑"/>
                 <a:cs typeface="微软雅黑"/>
               </a:rPr>
-              <a:t>!</a:t>
-            </a:r>
-          </a:p>
-        </p:txBody>
-      </p:sp>
-      <p:sp>
-        <p:nvSpPr>
-          <p:cNvPr id="8" name="TextBox 7"/>
+              <a:t>难点 1</a:t>
+            </a:r>
+          </a:p>
+        </p:txBody>
+      </p:sp>
+      <p:sp>
+        <p:nvSpPr>
+          <p:cNvPr id="9" name="TextBox 8"/>
           <p:cNvSpPr txBox="1"/>
           <p:nvPr/>
         </p:nvSpPr>
         <p:spPr>
           <a:xfrm>
-            <a:off x="1371600" y="1527048"/>
-            <a:ext cx="4434840" cy="457200"/>
+            <a:off x="914400" y="2971800"/>
+            <a:ext cx="2844698" cy="3017520"/>
           </a:xfrm>
           <a:prstGeom prst="rect">
             <a:avLst/>
@@ -6917,52 +7131,14 @@
           <a:p>
             <a:pPr algn="l">
               <a:lnSpc>
-                <a:spcPct val="110000"/>
+                <a:spcPct val="145000"/>
               </a:lnSpc>
+              <a:spcAft>
+                <a:spcPts val="600"/>
+              </a:spcAft>
             </a:pPr>
             <a:r>
-              <a:rPr sz="1600" b="1">
-                <a:solidFill>
-                  <a:srgbClr val="1C2A33"/>
-                </a:solidFill>
-                <a:latin typeface="微软雅黑"/>
-                <a:ea typeface="微软雅黑"/>
-                <a:cs typeface="微软雅黑"/>
-              </a:rPr>
-              <a:t/>
-            </a:r>
-          </a:p>
-        </p:txBody>
-      </p:sp>
-      <p:sp>
-        <p:nvSpPr>
-          <p:cNvPr id="9" name="TextBox 8"/>
-          <p:cNvSpPr txBox="1"/>
-          <p:nvPr/>
-        </p:nvSpPr>
-        <p:spPr>
-          <a:xfrm>
-            <a:off x="1371600" y="1965960"/>
-            <a:ext cx="4434840" cy="1417320"/>
-          </a:xfrm>
-          <a:prstGeom prst="rect">
-            <a:avLst/>
-          </a:prstGeom>
-          <a:noFill/>
-        </p:spPr>
-        <p:txBody>
-          <a:bodyPr wrap="square" anchor="t" lIns="0" rIns="0" tIns="0" bIns="0">
-            <a:spAutoFit/>
-          </a:bodyPr>
-          <a:lstStyle/>
-          <a:p>
-            <a:pPr algn="l">
-              <a:lnSpc>
-                <a:spcPct val="128000"/>
-              </a:lnSpc>
-            </a:pPr>
-            <a:r>
-              <a:rPr sz="1400" b="0">
+              <a:rPr sz="1500" b="1">
                 <a:solidFill>
                   <a:srgbClr val="1C2A33"/>
                 </a:solidFill>
@@ -6970,7 +7146,25 @@
                 <a:ea typeface="楷体"/>
                 <a:cs typeface="楷体"/>
               </a:rPr>
-              <a:t>① 观念提炼。原因：学生见词不见观念，需示范「词→念」。</a:t>
+              <a:t>观念提炼</a:t>
+            </a:r>
+          </a:p>
+          <a:p>
+            <a:pPr algn="l">
+              <a:lnSpc>
+                <a:spcPct val="150000"/>
+              </a:lnSpc>
+            </a:pPr>
+            <a:r>
+              <a:rPr sz="1300" b="0">
+                <a:solidFill>
+                  <a:srgbClr val="B23A2A"/>
+                </a:solidFill>
+                <a:latin typeface="楷体"/>
+                <a:ea typeface="楷体"/>
+                <a:cs typeface="楷体"/>
+              </a:rPr>
+              <a:t>破解：学生见词不见观念，需示范「词→念」。</a:t>
             </a:r>
           </a:p>
         </p:txBody>
@@ -6983,8 +7177,8 @@
         </p:nvSpPr>
         <p:spPr>
           <a:xfrm>
-            <a:off x="6263640" y="1417320"/>
-            <a:ext cx="5349240" cy="2057400"/>
+            <a:off x="4399178" y="2194560"/>
+            <a:ext cx="3393338" cy="3931920"/>
           </a:xfrm>
           <a:prstGeom prst="roundRect">
             <a:avLst/>
@@ -6992,9 +7186,9 @@
           <a:solidFill>
             <a:srgbClr val="FFFFFF"/>
           </a:solidFill>
-          <a:ln w="22860">
+          <a:ln w="20320">
             <a:solidFill>
-              <a:srgbClr val="B23A2A"/>
+              <a:srgbClr val="2E7D6B"/>
             </a:solidFill>
           </a:ln>
           <a:effectLst/>
@@ -7023,20 +7217,20 @@
       </p:sp>
       <p:sp>
         <p:nvSpPr>
-          <p:cNvPr id="11" name="Oval 10"/>
+          <p:cNvPr id="11" name="Rectangle 10"/>
           <p:cNvSpPr/>
           <p:nvPr/>
         </p:nvSpPr>
         <p:spPr>
           <a:xfrm>
-            <a:off x="6428232" y="1581912"/>
-            <a:ext cx="457200" cy="457200"/>
-          </a:xfrm>
-          <a:prstGeom prst="ellipse">
+            <a:off x="4399178" y="2194560"/>
+            <a:ext cx="3393338" cy="548640"/>
+          </a:xfrm>
+          <a:prstGeom prst="rect">
             <a:avLst/>
           </a:prstGeom>
           <a:solidFill>
-            <a:srgbClr val="B23A2A"/>
+            <a:srgbClr val="2E7D6B"/>
           </a:solidFill>
           <a:ln>
             <a:noFill/>
@@ -7073,8 +7267,8 @@
         </p:nvSpPr>
         <p:spPr>
           <a:xfrm>
-            <a:off x="6428232" y="1636776"/>
-            <a:ext cx="457200" cy="384048"/>
+            <a:off x="4399178" y="2304288"/>
+            <a:ext cx="3393338" cy="365760"/>
           </a:xfrm>
           <a:prstGeom prst="rect">
             <a:avLst/>
@@ -7089,7 +7283,7 @@
           <a:p>
             <a:pPr algn="ctr"/>
             <a:r>
-              <a:rPr sz="1600" b="1">
+              <a:rPr sz="1500" b="1">
                 <a:solidFill>
                   <a:srgbClr val="FFFFFF"/>
                 </a:solidFill>
@@ -7097,7 +7291,7 @@
                 <a:ea typeface="微软雅黑"/>
                 <a:cs typeface="微软雅黑"/>
               </a:rPr>
-              <a:t>!</a:t>
+              <a:t>难点 2</a:t>
             </a:r>
           </a:p>
         </p:txBody>
@@ -7110,8 +7304,8 @@
         </p:nvSpPr>
         <p:spPr>
           <a:xfrm>
-            <a:off x="6995160" y="1527048"/>
-            <a:ext cx="4434840" cy="457200"/>
+            <a:off x="4673498" y="2971800"/>
+            <a:ext cx="2844698" cy="3017520"/>
           </a:xfrm>
           <a:prstGeom prst="rect">
             <a:avLst/>
@@ -7126,52 +7320,14 @@
           <a:p>
             <a:pPr algn="l">
               <a:lnSpc>
-                <a:spcPct val="110000"/>
+                <a:spcPct val="145000"/>
               </a:lnSpc>
+              <a:spcAft>
+                <a:spcPts val="600"/>
+              </a:spcAft>
             </a:pPr>
             <a:r>
-              <a:rPr sz="1600" b="1">
-                <a:solidFill>
-                  <a:srgbClr val="1C2A33"/>
-                </a:solidFill>
-                <a:latin typeface="微软雅黑"/>
-                <a:ea typeface="微软雅黑"/>
-                <a:cs typeface="微软雅黑"/>
-              </a:rPr>
-              <a:t/>
-            </a:r>
-          </a:p>
-        </p:txBody>
-      </p:sp>
-      <p:sp>
-        <p:nvSpPr>
-          <p:cNvPr id="14" name="TextBox 13"/>
-          <p:cNvSpPr txBox="1"/>
-          <p:nvPr/>
-        </p:nvSpPr>
-        <p:spPr>
-          <a:xfrm>
-            <a:off x="6995160" y="1965960"/>
-            <a:ext cx="4434840" cy="1417320"/>
-          </a:xfrm>
-          <a:prstGeom prst="rect">
-            <a:avLst/>
-          </a:prstGeom>
-          <a:noFill/>
-        </p:spPr>
-        <p:txBody>
-          <a:bodyPr wrap="square" anchor="t" lIns="0" rIns="0" tIns="0" bIns="0">
-            <a:spAutoFit/>
-          </a:bodyPr>
-          <a:lstStyle/>
-          <a:p>
-            <a:pPr algn="l">
-              <a:lnSpc>
-                <a:spcPct val="128000"/>
-              </a:lnSpc>
-            </a:pPr>
-            <a:r>
-              <a:rPr sz="1400" b="0">
+              <a:rPr sz="1500" b="1">
                 <a:solidFill>
                   <a:srgbClr val="1C2A33"/>
                 </a:solidFill>
@@ -7179,21 +7335,39 @@
                 <a:ea typeface="楷体"/>
                 <a:cs typeface="楷体"/>
               </a:rPr>
-              <a:t>② 称谓代称。原因：布衣等代称陌生，需解。</a:t>
-            </a:r>
-          </a:p>
-        </p:txBody>
-      </p:sp>
-      <p:sp>
-        <p:nvSpPr>
-          <p:cNvPr id="15" name="Rounded Rectangle 14"/>
+              <a:t>称谓代称</a:t>
+            </a:r>
+          </a:p>
+          <a:p>
+            <a:pPr algn="l">
+              <a:lnSpc>
+                <a:spcPct val="150000"/>
+              </a:lnSpc>
+            </a:pPr>
+            <a:r>
+              <a:rPr sz="1300" b="0">
+                <a:solidFill>
+                  <a:srgbClr val="2E7D6B"/>
+                </a:solidFill>
+                <a:latin typeface="楷体"/>
+                <a:ea typeface="楷体"/>
+                <a:cs typeface="楷体"/>
+              </a:rPr>
+              <a:t>破解：布衣等代称陌生，需解。</a:t>
+            </a:r>
+          </a:p>
+        </p:txBody>
+      </p:sp>
+      <p:sp>
+        <p:nvSpPr>
+          <p:cNvPr id="14" name="Rounded Rectangle 13"/>
           <p:cNvSpPr/>
           <p:nvPr/>
         </p:nvSpPr>
         <p:spPr>
           <a:xfrm>
-            <a:off x="640080" y="3703320"/>
-            <a:ext cx="5349240" cy="2057400"/>
+            <a:off x="8158276" y="2194560"/>
+            <a:ext cx="3393338" cy="3931920"/>
           </a:xfrm>
           <a:prstGeom prst="roundRect">
             <a:avLst/>
@@ -7201,9 +7375,9 @@
           <a:solidFill>
             <a:srgbClr val="FFFFFF"/>
           </a:solidFill>
-          <a:ln w="22860">
+          <a:ln w="20320">
             <a:solidFill>
-              <a:srgbClr val="B23A2A"/>
+              <a:srgbClr val="C8A86B"/>
             </a:solidFill>
           </a:ln>
           <a:effectLst/>
@@ -7232,20 +7406,20 @@
       </p:sp>
       <p:sp>
         <p:nvSpPr>
-          <p:cNvPr id="16" name="Oval 15"/>
+          <p:cNvPr id="15" name="Rectangle 14"/>
           <p:cNvSpPr/>
           <p:nvPr/>
         </p:nvSpPr>
         <p:spPr>
           <a:xfrm>
-            <a:off x="804672" y="3867912"/>
-            <a:ext cx="457200" cy="457200"/>
-          </a:xfrm>
-          <a:prstGeom prst="ellipse">
+            <a:off x="8158276" y="2194560"/>
+            <a:ext cx="3393338" cy="548640"/>
+          </a:xfrm>
+          <a:prstGeom prst="rect">
             <a:avLst/>
           </a:prstGeom>
           <a:solidFill>
-            <a:srgbClr val="B23A2A"/>
+            <a:srgbClr val="C8A86B"/>
           </a:solidFill>
           <a:ln>
             <a:noFill/>
@@ -7276,14 +7450,14 @@
       </p:sp>
       <p:sp>
         <p:nvSpPr>
-          <p:cNvPr id="17" name="TextBox 16"/>
+          <p:cNvPr id="16" name="TextBox 15"/>
           <p:cNvSpPr txBox="1"/>
           <p:nvPr/>
         </p:nvSpPr>
         <p:spPr>
           <a:xfrm>
-            <a:off x="804672" y="3922776"/>
-            <a:ext cx="457200" cy="384048"/>
+            <a:off x="8158276" y="2304288"/>
+            <a:ext cx="3393338" cy="365760"/>
           </a:xfrm>
           <a:prstGeom prst="rect">
             <a:avLst/>
@@ -7298,7 +7472,7 @@
           <a:p>
             <a:pPr algn="ctr"/>
             <a:r>
-              <a:rPr sz="1600" b="1">
+              <a:rPr sz="1500" b="1">
                 <a:solidFill>
                   <a:srgbClr val="FFFFFF"/>
                 </a:solidFill>
@@ -7306,21 +7480,21 @@
                 <a:ea typeface="微软雅黑"/>
                 <a:cs typeface="微软雅黑"/>
               </a:rPr>
-              <a:t>!</a:t>
-            </a:r>
-          </a:p>
-        </p:txBody>
-      </p:sp>
-      <p:sp>
-        <p:nvSpPr>
-          <p:cNvPr id="18" name="TextBox 17"/>
+              <a:t>难点 3</a:t>
+            </a:r>
+          </a:p>
+        </p:txBody>
+      </p:sp>
+      <p:sp>
+        <p:nvSpPr>
+          <p:cNvPr id="17" name="TextBox 16"/>
           <p:cNvSpPr txBox="1"/>
           <p:nvPr/>
         </p:nvSpPr>
         <p:spPr>
           <a:xfrm>
-            <a:off x="1371600" y="3813048"/>
-            <a:ext cx="4434840" cy="457200"/>
+            <a:off x="8432596" y="2971800"/>
+            <a:ext cx="2844698" cy="3017520"/>
           </a:xfrm>
           <a:prstGeom prst="rect">
             <a:avLst/>
@@ -7335,52 +7509,14 @@
           <a:p>
             <a:pPr algn="l">
               <a:lnSpc>
-                <a:spcPct val="110000"/>
+                <a:spcPct val="145000"/>
               </a:lnSpc>
+              <a:spcAft>
+                <a:spcPts val="600"/>
+              </a:spcAft>
             </a:pPr>
             <a:r>
-              <a:rPr sz="1600" b="1">
-                <a:solidFill>
-                  <a:srgbClr val="1C2A33"/>
-                </a:solidFill>
-                <a:latin typeface="微软雅黑"/>
-                <a:ea typeface="微软雅黑"/>
-                <a:cs typeface="微软雅黑"/>
-              </a:rPr>
-              <a:t/>
-            </a:r>
-          </a:p>
-        </p:txBody>
-      </p:sp>
-      <p:sp>
-        <p:nvSpPr>
-          <p:cNvPr id="19" name="TextBox 18"/>
-          <p:cNvSpPr txBox="1"/>
-          <p:nvPr/>
-        </p:nvSpPr>
-        <p:spPr>
-          <a:xfrm>
-            <a:off x="1371600" y="4251960"/>
-            <a:ext cx="4434840" cy="1417320"/>
-          </a:xfrm>
-          <a:prstGeom prst="rect">
-            <a:avLst/>
-          </a:prstGeom>
-          <a:noFill/>
-        </p:spPr>
-        <p:txBody>
-          <a:bodyPr wrap="square" anchor="t" lIns="0" rIns="0" tIns="0" bIns="0">
-            <a:spAutoFit/>
-          </a:bodyPr>
-          <a:lstStyle/>
-          <a:p>
-            <a:pPr algn="l">
-              <a:lnSpc>
-                <a:spcPct val="128000"/>
-              </a:lnSpc>
-            </a:pPr>
-            <a:r>
-              <a:rPr sz="1400" b="0">
+              <a:rPr sz="1500" b="1">
                 <a:solidFill>
                   <a:srgbClr val="1C2A33"/>
                 </a:solidFill>
@@ -7388,14 +7524,32 @@
                 <a:ea typeface="楷体"/>
                 <a:cs typeface="楷体"/>
               </a:rPr>
-              <a:t>③ 文化联结。原因：积累与文化脱节，需桥接。</a:t>
-            </a:r>
-          </a:p>
-        </p:txBody>
-      </p:sp>
-      <p:sp>
-        <p:nvSpPr>
-          <p:cNvPr id="20" name="TextBox 19"/>
+              <a:t>文化联结</a:t>
+            </a:r>
+          </a:p>
+          <a:p>
+            <a:pPr algn="l">
+              <a:lnSpc>
+                <a:spcPct val="150000"/>
+              </a:lnSpc>
+            </a:pPr>
+            <a:r>
+              <a:rPr sz="1300" b="0">
+                <a:solidFill>
+                  <a:srgbClr val="C8A86B"/>
+                </a:solidFill>
+                <a:latin typeface="楷体"/>
+                <a:ea typeface="楷体"/>
+                <a:cs typeface="楷体"/>
+              </a:rPr>
+              <a:t>破解：积累与文化脱节，需桥接。</a:t>
+            </a:r>
+          </a:p>
+        </p:txBody>
+      </p:sp>
+      <p:sp>
+        <p:nvSpPr>
+          <p:cNvPr id="18" name="TextBox 17"/>
           <p:cNvSpPr txBox="1"/>
           <p:nvPr/>
         </p:nvSpPr>
@@ -7522,13 +7676,13 @@
             <a:r>
               <a:rPr sz="1300" b="1">
                 <a:solidFill>
-                  <a:srgbClr val="C8A86B"/>
+                  <a:srgbClr val="B23A2A"/>
                 </a:solidFill>
                 <a:latin typeface="微软雅黑"/>
                 <a:ea typeface="微软雅黑"/>
                 <a:cs typeface="微软雅黑"/>
               </a:rPr>
-              <a:t>要点板书</a:t>
+              <a:t>板书精华</a:t>
             </a:r>
           </a:p>
         </p:txBody>
@@ -7543,6 +7697,133 @@
           <a:xfrm>
             <a:off x="640080" y="1097280"/>
             <a:ext cx="822960" cy="30480"/>
+          </a:xfrm>
+          <a:prstGeom prst="rect">
+            <a:avLst/>
+          </a:prstGeom>
+          <a:solidFill>
+            <a:srgbClr val="B23A2A"/>
+          </a:solidFill>
+          <a:ln>
+            <a:noFill/>
+          </a:ln>
+          <a:effectLst/>
+        </p:spPr>
+        <p:style>
+          <a:lnRef idx="1">
+            <a:schemeClr val="accent1"/>
+          </a:lnRef>
+          <a:fillRef idx="3">
+            <a:schemeClr val="accent1"/>
+          </a:fillRef>
+          <a:effectRef idx="2">
+            <a:schemeClr val="accent1"/>
+          </a:effectRef>
+          <a:fontRef idx="minor">
+            <a:schemeClr val="lt1"/>
+          </a:fontRef>
+        </p:style>
+        <p:txBody>
+          <a:bodyPr rtlCol="0" anchor="ctr"/>
+          <a:lstStyle/>
+          <a:p>
+            <a:pPr algn="ctr"/>
+          </a:p>
+        </p:txBody>
+      </p:sp>
+      <p:sp>
+        <p:nvSpPr>
+          <p:cNvPr id="5" name="TextBox 4"/>
+          <p:cNvSpPr txBox="1"/>
+          <p:nvPr/>
+        </p:nvSpPr>
+        <p:spPr>
+          <a:xfrm>
+            <a:off x="640080" y="1325880"/>
+            <a:ext cx="10058400" cy="640080"/>
+          </a:xfrm>
+          <a:prstGeom prst="rect">
+            <a:avLst/>
+          </a:prstGeom>
+          <a:noFill/>
+        </p:spPr>
+        <p:txBody>
+          <a:bodyPr wrap="square" anchor="t" lIns="0" rIns="0" tIns="0" bIns="0">
+            <a:spAutoFit/>
+          </a:bodyPr>
+          <a:lstStyle/>
+          <a:p>
+            <a:pPr algn="l"/>
+            <a:r>
+              <a:rPr sz="3000" b="1">
+                <a:solidFill>
+                  <a:srgbClr val="1C2A33"/>
+                </a:solidFill>
+                <a:latin typeface="楷体"/>
+                <a:ea typeface="楷体"/>
+                <a:cs typeface="楷体"/>
+              </a:rPr>
+              <a:t>板书精华</a:t>
+            </a:r>
+          </a:p>
+        </p:txBody>
+      </p:sp>
+      <p:sp>
+        <p:nvSpPr>
+          <p:cNvPr id="6" name="Rounded Rectangle 5"/>
+          <p:cNvSpPr/>
+          <p:nvPr/>
+        </p:nvSpPr>
+        <p:spPr>
+          <a:xfrm>
+            <a:off x="640080" y="1828800"/>
+            <a:ext cx="10911535" cy="4297680"/>
+          </a:xfrm>
+          <a:prstGeom prst="roundRect">
+            <a:avLst/>
+          </a:prstGeom>
+          <a:solidFill>
+            <a:srgbClr val="FFFFFF"/>
+          </a:solidFill>
+          <a:ln w="20320">
+            <a:solidFill>
+              <a:srgbClr val="C8A86B"/>
+            </a:solidFill>
+          </a:ln>
+          <a:effectLst/>
+        </p:spPr>
+        <p:style>
+          <a:lnRef idx="1">
+            <a:schemeClr val="accent1"/>
+          </a:lnRef>
+          <a:fillRef idx="3">
+            <a:schemeClr val="accent1"/>
+          </a:fillRef>
+          <a:effectRef idx="2">
+            <a:schemeClr val="accent1"/>
+          </a:effectRef>
+          <a:fontRef idx="minor">
+            <a:schemeClr val="lt1"/>
+          </a:fontRef>
+        </p:style>
+        <p:txBody>
+          <a:bodyPr rtlCol="0" anchor="ctr"/>
+          <a:lstStyle/>
+          <a:p>
+            <a:pPr algn="ctr"/>
+          </a:p>
+        </p:txBody>
+      </p:sp>
+      <p:sp>
+        <p:nvSpPr>
+          <p:cNvPr id="7" name="Rectangle 6"/>
+          <p:cNvSpPr/>
+          <p:nvPr/>
+        </p:nvSpPr>
+        <p:spPr>
+          <a:xfrm>
+            <a:off x="640080" y="1828800"/>
+            <a:ext cx="128016" cy="4297680"/>
           </a:xfrm>
           <a:prstGeom prst="rect">
             <a:avLst/>
@@ -7579,60 +7860,14 @@
       </p:sp>
       <p:sp>
         <p:nvSpPr>
-          <p:cNvPr id="5" name="Rounded Rectangle 4"/>
-          <p:cNvSpPr/>
-          <p:nvPr/>
-        </p:nvSpPr>
-        <p:spPr>
-          <a:xfrm>
-            <a:off x="640080" y="1417320"/>
-            <a:ext cx="10911535" cy="5394960"/>
-          </a:xfrm>
-          <a:prstGeom prst="roundRect">
-            <a:avLst/>
-          </a:prstGeom>
-          <a:solidFill>
-            <a:srgbClr val="FFFFFF"/>
-          </a:solidFill>
-          <a:ln w="25400">
-            <a:solidFill>
-              <a:srgbClr val="C8A86B"/>
-            </a:solidFill>
-          </a:ln>
-          <a:effectLst/>
-        </p:spPr>
-        <p:style>
-          <a:lnRef idx="1">
-            <a:schemeClr val="accent1"/>
-          </a:lnRef>
-          <a:fillRef idx="3">
-            <a:schemeClr val="accent1"/>
-          </a:fillRef>
-          <a:effectRef idx="2">
-            <a:schemeClr val="accent1"/>
-          </a:effectRef>
-          <a:fontRef idx="minor">
-            <a:schemeClr val="lt1"/>
-          </a:fontRef>
-        </p:style>
-        <p:txBody>
-          <a:bodyPr rtlCol="0" anchor="ctr"/>
-          <a:lstStyle/>
-          <a:p>
-            <a:pPr algn="ctr"/>
-          </a:p>
-        </p:txBody>
-      </p:sp>
-      <p:sp>
-        <p:nvSpPr>
-          <p:cNvPr id="6" name="TextBox 5"/>
+          <p:cNvPr id="8" name="TextBox 7"/>
           <p:cNvSpPr txBox="1"/>
           <p:nvPr/>
         </p:nvSpPr>
         <p:spPr>
           <a:xfrm>
-            <a:off x="914400" y="1554480"/>
-            <a:ext cx="10362895" cy="5120640"/>
+            <a:off x="1051560" y="2057400"/>
+            <a:ext cx="10180015" cy="3840480"/>
           </a:xfrm>
           <a:prstGeom prst="rect">
             <a:avLst/>
@@ -7647,43 +7882,197 @@
           <a:p>
             <a:pPr algn="l">
               <a:lnSpc>
-                <a:spcPct val="110000"/>
+                <a:spcPct val="130000"/>
               </a:lnSpc>
               <a:spcAft>
-                <a:spcPts val="100"/>
+                <a:spcPts val="500"/>
               </a:spcAft>
             </a:pPr>
             <a:r>
-              <a:rPr sz="1300" b="0">
+              <a:rPr sz="1400" b="0">
                 <a:solidFill>
                   <a:srgbClr val="1C2A33"/>
                 </a:solidFill>
-                <a:latin typeface="微软雅黑"/>
-                <a:ea typeface="微软雅黑"/>
-                <a:cs typeface="微软雅黑"/>
+                <a:latin typeface="楷体"/>
+                <a:ea typeface="楷体"/>
+                <a:cs typeface="楷体"/>
               </a:rPr>
-              <a:t>┌── 词语文化意蕴 ──┐
-│ 词载文化 │
-│ │
-│ 修养观: │
-│ 温良恭俭让(儒) │
-│ │
-│ 称谓: │
-│ 布衣=平民 │
-│ 巾帼=女·须眉=男│
-│ │
-│ 科举:折桂/及第 │
-│ 时间:一元复始 │
-│ │
-│ 今语存古念 │
-└────────────────┘</a:t>
-            </a:r>
-          </a:p>
-        </p:txBody>
-      </p:sp>
-      <p:sp>
-        <p:nvSpPr>
-          <p:cNvPr id="7" name="TextBox 6"/>
+              <a:t>词载文化</a:t>
+            </a:r>
+          </a:p>
+          <a:p>
+            <a:pPr algn="l">
+              <a:lnSpc>
+                <a:spcPct val="130000"/>
+              </a:lnSpc>
+              <a:spcAft>
+                <a:spcPts val="500"/>
+              </a:spcAft>
+            </a:pPr>
+            <a:r>
+              <a:rPr sz="1400" b="0">
+                <a:solidFill>
+                  <a:srgbClr val="1C2A33"/>
+                </a:solidFill>
+                <a:latin typeface="楷体"/>
+                <a:ea typeface="楷体"/>
+                <a:cs typeface="楷体"/>
+              </a:rPr>
+              <a:t>修养观:</a:t>
+            </a:r>
+          </a:p>
+          <a:p>
+            <a:pPr algn="l">
+              <a:lnSpc>
+                <a:spcPct val="130000"/>
+              </a:lnSpc>
+              <a:spcAft>
+                <a:spcPts val="500"/>
+              </a:spcAft>
+            </a:pPr>
+            <a:r>
+              <a:rPr sz="1400" b="0">
+                <a:solidFill>
+                  <a:srgbClr val="1C2A33"/>
+                </a:solidFill>
+                <a:latin typeface="楷体"/>
+                <a:ea typeface="楷体"/>
+                <a:cs typeface="楷体"/>
+              </a:rPr>
+              <a:t>温良恭俭让(儒)</a:t>
+            </a:r>
+          </a:p>
+          <a:p>
+            <a:pPr algn="l">
+              <a:lnSpc>
+                <a:spcPct val="130000"/>
+              </a:lnSpc>
+              <a:spcAft>
+                <a:spcPts val="500"/>
+              </a:spcAft>
+            </a:pPr>
+            <a:r>
+              <a:rPr sz="1400" b="0">
+                <a:solidFill>
+                  <a:srgbClr val="1C2A33"/>
+                </a:solidFill>
+                <a:latin typeface="楷体"/>
+                <a:ea typeface="楷体"/>
+                <a:cs typeface="楷体"/>
+              </a:rPr>
+              <a:t>称谓:</a:t>
+            </a:r>
+          </a:p>
+          <a:p>
+            <a:pPr algn="l">
+              <a:lnSpc>
+                <a:spcPct val="130000"/>
+              </a:lnSpc>
+              <a:spcAft>
+                <a:spcPts val="500"/>
+              </a:spcAft>
+            </a:pPr>
+            <a:r>
+              <a:rPr sz="1400" b="0">
+                <a:solidFill>
+                  <a:srgbClr val="1C2A33"/>
+                </a:solidFill>
+                <a:latin typeface="楷体"/>
+                <a:ea typeface="楷体"/>
+                <a:cs typeface="楷体"/>
+              </a:rPr>
+              <a:t>布衣=平民</a:t>
+            </a:r>
+          </a:p>
+          <a:p>
+            <a:pPr algn="l">
+              <a:lnSpc>
+                <a:spcPct val="130000"/>
+              </a:lnSpc>
+              <a:spcAft>
+                <a:spcPts val="500"/>
+              </a:spcAft>
+            </a:pPr>
+            <a:r>
+              <a:rPr sz="1400" b="0">
+                <a:solidFill>
+                  <a:srgbClr val="1C2A33"/>
+                </a:solidFill>
+                <a:latin typeface="楷体"/>
+                <a:ea typeface="楷体"/>
+                <a:cs typeface="楷体"/>
+              </a:rPr>
+              <a:t>巾帼=女·须眉=男</a:t>
+            </a:r>
+          </a:p>
+          <a:p>
+            <a:pPr algn="l">
+              <a:lnSpc>
+                <a:spcPct val="130000"/>
+              </a:lnSpc>
+              <a:spcAft>
+                <a:spcPts val="500"/>
+              </a:spcAft>
+            </a:pPr>
+            <a:r>
+              <a:rPr sz="1400" b="0">
+                <a:solidFill>
+                  <a:srgbClr val="1C2A33"/>
+                </a:solidFill>
+                <a:latin typeface="楷体"/>
+                <a:ea typeface="楷体"/>
+                <a:cs typeface="楷体"/>
+              </a:rPr>
+              <a:t>科举:折桂/及第</a:t>
+            </a:r>
+          </a:p>
+          <a:p>
+            <a:pPr algn="l">
+              <a:lnSpc>
+                <a:spcPct val="130000"/>
+              </a:lnSpc>
+              <a:spcAft>
+                <a:spcPts val="500"/>
+              </a:spcAft>
+            </a:pPr>
+            <a:r>
+              <a:rPr sz="1400" b="0">
+                <a:solidFill>
+                  <a:srgbClr val="1C2A33"/>
+                </a:solidFill>
+                <a:latin typeface="楷体"/>
+                <a:ea typeface="楷体"/>
+                <a:cs typeface="楷体"/>
+              </a:rPr>
+              <a:t>时间:一元复始</a:t>
+            </a:r>
+          </a:p>
+          <a:p>
+            <a:pPr algn="l">
+              <a:lnSpc>
+                <a:spcPct val="130000"/>
+              </a:lnSpc>
+              <a:spcAft>
+                <a:spcPts val="500"/>
+              </a:spcAft>
+            </a:pPr>
+            <a:r>
+              <a:rPr sz="1400" b="0">
+                <a:solidFill>
+                  <a:srgbClr val="1C2A33"/>
+                </a:solidFill>
+                <a:latin typeface="楷体"/>
+                <a:ea typeface="楷体"/>
+                <a:cs typeface="楷体"/>
+              </a:rPr>
+              <a:t>今语存古念</a:t>
+            </a:r>
+          </a:p>
+        </p:txBody>
+      </p:sp>
+      <p:sp>
+        <p:nvSpPr>
+          <p:cNvPr id="9" name="TextBox 8"/>
           <p:cNvSpPr txBox="1"/>
           <p:nvPr/>
         </p:nvSpPr>
@@ -7810,13 +8199,13 @@
             <a:r>
               <a:rPr sz="1300" b="1">
                 <a:solidFill>
-                  <a:srgbClr val="2E7D6B"/>
+                  <a:srgbClr val="B23A2A"/>
                 </a:solidFill>
                 <a:latin typeface="微软雅黑"/>
                 <a:ea typeface="微软雅黑"/>
                 <a:cs typeface="微软雅黑"/>
               </a:rPr>
-              <a:t>分层作业</a:t>
+              <a:t>作业</a:t>
             </a:r>
           </a:p>
         </p:txBody>
@@ -7831,6 +8220,301 @@
           <a:xfrm>
             <a:off x="640080" y="1097280"/>
             <a:ext cx="822960" cy="30480"/>
+          </a:xfrm>
+          <a:prstGeom prst="rect">
+            <a:avLst/>
+          </a:prstGeom>
+          <a:solidFill>
+            <a:srgbClr val="B23A2A"/>
+          </a:solidFill>
+          <a:ln>
+            <a:noFill/>
+          </a:ln>
+          <a:effectLst/>
+        </p:spPr>
+        <p:style>
+          <a:lnRef idx="1">
+            <a:schemeClr val="accent1"/>
+          </a:lnRef>
+          <a:fillRef idx="3">
+            <a:schemeClr val="accent1"/>
+          </a:fillRef>
+          <a:effectRef idx="2">
+            <a:schemeClr val="accent1"/>
+          </a:effectRef>
+          <a:fontRef idx="minor">
+            <a:schemeClr val="lt1"/>
+          </a:fontRef>
+        </p:style>
+        <p:txBody>
+          <a:bodyPr rtlCol="0" anchor="ctr"/>
+          <a:lstStyle/>
+          <a:p>
+            <a:pPr algn="ctr"/>
+          </a:p>
+        </p:txBody>
+      </p:sp>
+      <p:sp>
+        <p:nvSpPr>
+          <p:cNvPr id="5" name="TextBox 4"/>
+          <p:cNvSpPr txBox="1"/>
+          <p:nvPr/>
+        </p:nvSpPr>
+        <p:spPr>
+          <a:xfrm>
+            <a:off x="640080" y="1325880"/>
+            <a:ext cx="10058400" cy="640080"/>
+          </a:xfrm>
+          <a:prstGeom prst="rect">
+            <a:avLst/>
+          </a:prstGeom>
+          <a:noFill/>
+        </p:spPr>
+        <p:txBody>
+          <a:bodyPr wrap="square" anchor="t" lIns="0" rIns="0" tIns="0" bIns="0">
+            <a:spAutoFit/>
+          </a:bodyPr>
+          <a:lstStyle/>
+          <a:p>
+            <a:pPr algn="l"/>
+            <a:r>
+              <a:rPr sz="3000" b="1">
+                <a:solidFill>
+                  <a:srgbClr val="1C2A33"/>
+                </a:solidFill>
+                <a:latin typeface="楷体"/>
+                <a:ea typeface="楷体"/>
+                <a:cs typeface="楷体"/>
+              </a:rPr>
+              <a:t>分层作业</a:t>
+            </a:r>
+          </a:p>
+        </p:txBody>
+      </p:sp>
+      <p:sp>
+        <p:nvSpPr>
+          <p:cNvPr id="6" name="Rounded Rectangle 5"/>
+          <p:cNvSpPr/>
+          <p:nvPr/>
+        </p:nvSpPr>
+        <p:spPr>
+          <a:xfrm>
+            <a:off x="640080" y="2194560"/>
+            <a:ext cx="5272887" cy="3931920"/>
+          </a:xfrm>
+          <a:prstGeom prst="roundRect">
+            <a:avLst/>
+          </a:prstGeom>
+          <a:solidFill>
+            <a:srgbClr val="FFFFFF"/>
+          </a:solidFill>
+          <a:ln w="20320">
+            <a:solidFill>
+              <a:srgbClr val="B23A2A"/>
+            </a:solidFill>
+          </a:ln>
+          <a:effectLst/>
+        </p:spPr>
+        <p:style>
+          <a:lnRef idx="1">
+            <a:schemeClr val="accent1"/>
+          </a:lnRef>
+          <a:fillRef idx="3">
+            <a:schemeClr val="accent1"/>
+          </a:fillRef>
+          <a:effectRef idx="2">
+            <a:schemeClr val="accent1"/>
+          </a:effectRef>
+          <a:fontRef idx="minor">
+            <a:schemeClr val="lt1"/>
+          </a:fontRef>
+        </p:style>
+        <p:txBody>
+          <a:bodyPr rtlCol="0" anchor="ctr"/>
+          <a:lstStyle/>
+          <a:p>
+            <a:pPr algn="ctr"/>
+          </a:p>
+        </p:txBody>
+      </p:sp>
+      <p:sp>
+        <p:nvSpPr>
+          <p:cNvPr id="7" name="Rectangle 6"/>
+          <p:cNvSpPr/>
+          <p:nvPr/>
+        </p:nvSpPr>
+        <p:spPr>
+          <a:xfrm>
+            <a:off x="640080" y="2194560"/>
+            <a:ext cx="5272887" cy="548640"/>
+          </a:xfrm>
+          <a:prstGeom prst="rect">
+            <a:avLst/>
+          </a:prstGeom>
+          <a:solidFill>
+            <a:srgbClr val="B23A2A"/>
+          </a:solidFill>
+          <a:ln>
+            <a:noFill/>
+          </a:ln>
+          <a:effectLst/>
+        </p:spPr>
+        <p:style>
+          <a:lnRef idx="1">
+            <a:schemeClr val="accent1"/>
+          </a:lnRef>
+          <a:fillRef idx="3">
+            <a:schemeClr val="accent1"/>
+          </a:fillRef>
+          <a:effectRef idx="2">
+            <a:schemeClr val="accent1"/>
+          </a:effectRef>
+          <a:fontRef idx="minor">
+            <a:schemeClr val="lt1"/>
+          </a:fontRef>
+        </p:style>
+        <p:txBody>
+          <a:bodyPr rtlCol="0" anchor="ctr"/>
+          <a:lstStyle/>
+          <a:p>
+            <a:pPr algn="ctr"/>
+          </a:p>
+        </p:txBody>
+      </p:sp>
+      <p:sp>
+        <p:nvSpPr>
+          <p:cNvPr id="8" name="TextBox 7"/>
+          <p:cNvSpPr txBox="1"/>
+          <p:nvPr/>
+        </p:nvSpPr>
+        <p:spPr>
+          <a:xfrm>
+            <a:off x="640080" y="2304288"/>
+            <a:ext cx="5272887" cy="365760"/>
+          </a:xfrm>
+          <a:prstGeom prst="rect">
+            <a:avLst/>
+          </a:prstGeom>
+          <a:noFill/>
+        </p:spPr>
+        <p:txBody>
+          <a:bodyPr wrap="square" anchor="t" lIns="0" rIns="0" tIns="0" bIns="0">
+            <a:spAutoFit/>
+          </a:bodyPr>
+          <a:lstStyle/>
+          <a:p>
+            <a:pPr algn="ctr"/>
+            <a:r>
+              <a:rPr sz="1600" b="1">
+                <a:solidFill>
+                  <a:srgbClr val="FFFFFF"/>
+                </a:solidFill>
+                <a:latin typeface="微软雅黑"/>
+                <a:ea typeface="微软雅黑"/>
+                <a:cs typeface="微软雅黑"/>
+              </a:rPr>
+              <a:t>基础 · 必做</a:t>
+            </a:r>
+          </a:p>
+        </p:txBody>
+      </p:sp>
+      <p:sp>
+        <p:nvSpPr>
+          <p:cNvPr id="9" name="TextBox 8"/>
+          <p:cNvSpPr txBox="1"/>
+          <p:nvPr/>
+        </p:nvSpPr>
+        <p:spPr>
+          <a:xfrm>
+            <a:off x="914400" y="2971800"/>
+            <a:ext cx="4724247" cy="3017520"/>
+          </a:xfrm>
+          <a:prstGeom prst="rect">
+            <a:avLst/>
+          </a:prstGeom>
+          <a:noFill/>
+        </p:spPr>
+        <p:txBody>
+          <a:bodyPr wrap="square" anchor="t" lIns="0" rIns="0" tIns="0" bIns="0">
+            <a:spAutoFit/>
+          </a:bodyPr>
+          <a:lstStyle/>
+          <a:p>
+            <a:pPr algn="ctr">
+              <a:lnSpc>
+                <a:spcPct val="150000"/>
+              </a:lnSpc>
+            </a:pPr>
+            <a:r>
+              <a:rPr sz="1350" b="0">
+                <a:solidFill>
+                  <a:srgbClr val="1C2A33"/>
+                </a:solidFill>
+                <a:latin typeface="楷体"/>
+                <a:ea typeface="楷体"/>
+                <a:cs typeface="楷体"/>
+              </a:rPr>
+              <a:t>1. 解释「布衣」「巾帼」「折桂」的文化意蕴。2. 写一词载文化例（如四海/华夏）。</a:t>
+            </a:r>
+          </a:p>
+        </p:txBody>
+      </p:sp>
+      <p:sp>
+        <p:nvSpPr>
+          <p:cNvPr id="10" name="Rounded Rectangle 9"/>
+          <p:cNvSpPr/>
+          <p:nvPr/>
+        </p:nvSpPr>
+        <p:spPr>
+          <a:xfrm>
+            <a:off x="6278727" y="2194560"/>
+            <a:ext cx="5272887" cy="3931920"/>
+          </a:xfrm>
+          <a:prstGeom prst="roundRect">
+            <a:avLst/>
+          </a:prstGeom>
+          <a:solidFill>
+            <a:srgbClr val="FFFFFF"/>
+          </a:solidFill>
+          <a:ln w="20320">
+            <a:solidFill>
+              <a:srgbClr val="2E7D6B"/>
+            </a:solidFill>
+          </a:ln>
+          <a:effectLst/>
+        </p:spPr>
+        <p:style>
+          <a:lnRef idx="1">
+            <a:schemeClr val="accent1"/>
+          </a:lnRef>
+          <a:fillRef idx="3">
+            <a:schemeClr val="accent1"/>
+          </a:fillRef>
+          <a:effectRef idx="2">
+            <a:schemeClr val="accent1"/>
+          </a:effectRef>
+          <a:fontRef idx="minor">
+            <a:schemeClr val="lt1"/>
+          </a:fontRef>
+        </p:style>
+        <p:txBody>
+          <a:bodyPr rtlCol="0" anchor="ctr"/>
+          <a:lstStyle/>
+          <a:p>
+            <a:pPr algn="ctr"/>
+          </a:p>
+        </p:txBody>
+      </p:sp>
+      <p:sp>
+        <p:nvSpPr>
+          <p:cNvPr id="11" name="Rectangle 10"/>
+          <p:cNvSpPr/>
+          <p:nvPr/>
+        </p:nvSpPr>
+        <p:spPr>
+          <a:xfrm>
+            <a:off x="6278727" y="2194560"/>
+            <a:ext cx="5272887" cy="548640"/>
           </a:xfrm>
           <a:prstGeom prst="rect">
             <a:avLst/>
@@ -7867,60 +8551,14 @@
       </p:sp>
       <p:sp>
         <p:nvSpPr>
-          <p:cNvPr id="5" name="Rounded Rectangle 4"/>
-          <p:cNvSpPr/>
-          <p:nvPr/>
-        </p:nvSpPr>
-        <p:spPr>
-          <a:xfrm>
-            <a:off x="640080" y="1417320"/>
-            <a:ext cx="10911535" cy="1417320"/>
-          </a:xfrm>
-          <a:prstGeom prst="roundRect">
-            <a:avLst/>
-          </a:prstGeom>
-          <a:solidFill>
-            <a:srgbClr val="FFFFFF"/>
-          </a:solidFill>
-          <a:ln w="22860">
-            <a:solidFill>
-              <a:srgbClr val="2E7D6B"/>
-            </a:solidFill>
-          </a:ln>
-          <a:effectLst/>
-        </p:spPr>
-        <p:style>
-          <a:lnRef idx="1">
-            <a:schemeClr val="accent1"/>
-          </a:lnRef>
-          <a:fillRef idx="3">
-            <a:schemeClr val="accent1"/>
-          </a:fillRef>
-          <a:effectRef idx="2">
-            <a:schemeClr val="accent1"/>
-          </a:effectRef>
-          <a:fontRef idx="minor">
-            <a:schemeClr val="lt1"/>
-          </a:fontRef>
-        </p:style>
-        <p:txBody>
-          <a:bodyPr rtlCol="0" anchor="ctr"/>
-          <a:lstStyle/>
-          <a:p>
-            <a:pPr algn="ctr"/>
-          </a:p>
-        </p:txBody>
-      </p:sp>
-      <p:sp>
-        <p:nvSpPr>
-          <p:cNvPr id="6" name="TextBox 5"/>
+          <p:cNvPr id="12" name="TextBox 11"/>
           <p:cNvSpPr txBox="1"/>
           <p:nvPr/>
         </p:nvSpPr>
         <p:spPr>
           <a:xfrm>
-            <a:off x="1371600" y="1527048"/>
-            <a:ext cx="9997135" cy="457200"/>
+            <a:off x="6278727" y="2304288"/>
+            <a:ext cx="5272887" cy="365760"/>
           </a:xfrm>
           <a:prstGeom prst="rect">
             <a:avLst/>
@@ -7933,35 +8571,31 @@
           </a:bodyPr>
           <a:lstStyle/>
           <a:p>
-            <a:pPr algn="l">
-              <a:lnSpc>
-                <a:spcPct val="110000"/>
-              </a:lnSpc>
-            </a:pPr>
+            <a:pPr algn="ctr"/>
             <a:r>
               <a:rPr sz="1600" b="1">
                 <a:solidFill>
-                  <a:srgbClr val="1C2A33"/>
+                  <a:srgbClr val="FFFFFF"/>
                 </a:solidFill>
                 <a:latin typeface="微软雅黑"/>
                 <a:ea typeface="微软雅黑"/>
                 <a:cs typeface="微软雅黑"/>
               </a:rPr>
-              <a:t/>
-            </a:r>
-          </a:p>
-        </p:txBody>
-      </p:sp>
-      <p:sp>
-        <p:nvSpPr>
-          <p:cNvPr id="7" name="TextBox 6"/>
+              <a:t>提升 · 选做</a:t>
+            </a:r>
+          </a:p>
+        </p:txBody>
+      </p:sp>
+      <p:sp>
+        <p:nvSpPr>
+          <p:cNvPr id="13" name="TextBox 12"/>
           <p:cNvSpPr txBox="1"/>
           <p:nvPr/>
         </p:nvSpPr>
         <p:spPr>
           <a:xfrm>
-            <a:off x="1371600" y="1965960"/>
-            <a:ext cx="9997135" cy="777240"/>
+            <a:off x="6553047" y="2971800"/>
+            <a:ext cx="4724247" cy="3017520"/>
           </a:xfrm>
           <a:prstGeom prst="rect">
             <a:avLst/>
@@ -7974,13 +8608,13 @@
           </a:bodyPr>
           <a:lstStyle/>
           <a:p>
-            <a:pPr algn="l">
+            <a:pPr algn="ctr">
               <a:lnSpc>
-                <a:spcPct val="128000"/>
+                <a:spcPct val="150000"/>
               </a:lnSpc>
             </a:pPr>
             <a:r>
-              <a:rPr sz="1200" b="0">
+              <a:rPr sz="1350" b="0">
                 <a:solidFill>
                   <a:srgbClr val="1C2A33"/>
                 </a:solidFill>
@@ -7988,142 +8622,14 @@
                 <a:ea typeface="楷体"/>
                 <a:cs typeface="楷体"/>
               </a:rPr>
-              <a:t>【基础作业】1. 解释「布衣」「巾帼」「折桂」的文化意蕴。2. 写一词载文化例（如四海/华夏）。</a:t>
-            </a:r>
-          </a:p>
-        </p:txBody>
-      </p:sp>
-      <p:sp>
-        <p:nvSpPr>
-          <p:cNvPr id="8" name="Rounded Rectangle 7"/>
-          <p:cNvSpPr/>
-          <p:nvPr/>
-        </p:nvSpPr>
-        <p:spPr>
-          <a:xfrm>
-            <a:off x="640080" y="2971800"/>
-            <a:ext cx="10911535" cy="1417320"/>
-          </a:xfrm>
-          <a:prstGeom prst="roundRect">
-            <a:avLst/>
-          </a:prstGeom>
-          <a:solidFill>
-            <a:srgbClr val="FFFFFF"/>
-          </a:solidFill>
-          <a:ln w="22860">
-            <a:solidFill>
-              <a:srgbClr val="2E7D6B"/>
-            </a:solidFill>
-          </a:ln>
-          <a:effectLst/>
-        </p:spPr>
-        <p:style>
-          <a:lnRef idx="1">
-            <a:schemeClr val="accent1"/>
-          </a:lnRef>
-          <a:fillRef idx="3">
-            <a:schemeClr val="accent1"/>
-          </a:fillRef>
-          <a:effectRef idx="2">
-            <a:schemeClr val="accent1"/>
-          </a:effectRef>
-          <a:fontRef idx="minor">
-            <a:schemeClr val="lt1"/>
-          </a:fontRef>
-        </p:style>
-        <p:txBody>
-          <a:bodyPr rtlCol="0" anchor="ctr"/>
-          <a:lstStyle/>
-          <a:p>
-            <a:pPr algn="ctr"/>
-          </a:p>
-        </p:txBody>
-      </p:sp>
-      <p:sp>
-        <p:nvSpPr>
-          <p:cNvPr id="9" name="TextBox 8"/>
-          <p:cNvSpPr txBox="1"/>
-          <p:nvPr/>
-        </p:nvSpPr>
-        <p:spPr>
-          <a:xfrm>
-            <a:off x="1371600" y="3081528"/>
-            <a:ext cx="9997135" cy="457200"/>
-          </a:xfrm>
-          <a:prstGeom prst="rect">
-            <a:avLst/>
-          </a:prstGeom>
-          <a:noFill/>
-        </p:spPr>
-        <p:txBody>
-          <a:bodyPr wrap="square" anchor="t" lIns="0" rIns="0" tIns="0" bIns="0">
-            <a:spAutoFit/>
-          </a:bodyPr>
-          <a:lstStyle/>
-          <a:p>
-            <a:pPr algn="l">
-              <a:lnSpc>
-                <a:spcPct val="110000"/>
-              </a:lnSpc>
-            </a:pPr>
-            <a:r>
-              <a:rPr sz="1600" b="1">
-                <a:solidFill>
-                  <a:srgbClr val="1C2A33"/>
-                </a:solidFill>
-                <a:latin typeface="微软雅黑"/>
-                <a:ea typeface="微软雅黑"/>
-                <a:cs typeface="微软雅黑"/>
-              </a:rPr>
-              <a:t/>
-            </a:r>
-          </a:p>
-        </p:txBody>
-      </p:sp>
-      <p:sp>
-        <p:nvSpPr>
-          <p:cNvPr id="10" name="TextBox 9"/>
-          <p:cNvSpPr txBox="1"/>
-          <p:nvPr/>
-        </p:nvSpPr>
-        <p:spPr>
-          <a:xfrm>
-            <a:off x="1371600" y="3520440"/>
-            <a:ext cx="9997135" cy="777240"/>
-          </a:xfrm>
-          <a:prstGeom prst="rect">
-            <a:avLst/>
-          </a:prstGeom>
-          <a:noFill/>
-        </p:spPr>
-        <p:txBody>
-          <a:bodyPr wrap="square" anchor="t" lIns="0" rIns="0" tIns="0" bIns="0">
-            <a:spAutoFit/>
-          </a:bodyPr>
-          <a:lstStyle/>
-          <a:p>
-            <a:pPr algn="l">
-              <a:lnSpc>
-                <a:spcPct val="128000"/>
-              </a:lnSpc>
-            </a:pPr>
-            <a:r>
-              <a:rPr sz="1200" b="0">
-                <a:solidFill>
-                  <a:srgbClr val="1C2A33"/>
-                </a:solidFill>
-                <a:latin typeface="楷体"/>
-                <a:ea typeface="楷体"/>
-                <a:cs typeface="楷体"/>
-              </a:rPr>
-              <a:t>【提高作业】写150字「我挖到的词语文化」，要求：①举一词；②说它载的观念；③联今语。</a:t>
-            </a:r>
-          </a:p>
-        </p:txBody>
-      </p:sp>
-      <p:sp>
-        <p:nvSpPr>
-          <p:cNvPr id="11" name="TextBox 10"/>
+              <a:t>写150字「我挖到的词语文化」，要求：①举一词；②说它载的观念；③联今语。</a:t>
+            </a:r>
+          </a:p>
+        </p:txBody>
+      </p:sp>
+      <p:sp>
+        <p:nvSpPr>
+          <p:cNvPr id="14" name="TextBox 13"/>
           <p:cNvSpPr txBox="1"/>
           <p:nvPr/>
         </p:nvSpPr>
@@ -8250,13 +8756,13 @@
             <a:r>
               <a:rPr sz="1300" b="1">
                 <a:solidFill>
-                  <a:srgbClr val="C8A86B"/>
+                  <a:srgbClr val="B23A2A"/>
                 </a:solidFill>
                 <a:latin typeface="微软雅黑"/>
                 <a:ea typeface="微软雅黑"/>
                 <a:cs typeface="微软雅黑"/>
               </a:rPr>
-              <a:t>本课小结</a:t>
+              <a:t>单元小结</a:t>
             </a:r>
           </a:p>
         </p:txBody>
@@ -8273,6 +8779,551 @@
             <a:ext cx="822960" cy="30480"/>
           </a:xfrm>
           <a:prstGeom prst="rect">
+            <a:avLst/>
+          </a:prstGeom>
+          <a:solidFill>
+            <a:srgbClr val="B23A2A"/>
+          </a:solidFill>
+          <a:ln>
+            <a:noFill/>
+          </a:ln>
+          <a:effectLst/>
+        </p:spPr>
+        <p:style>
+          <a:lnRef idx="1">
+            <a:schemeClr val="accent1"/>
+          </a:lnRef>
+          <a:fillRef idx="3">
+            <a:schemeClr val="accent1"/>
+          </a:fillRef>
+          <a:effectRef idx="2">
+            <a:schemeClr val="accent1"/>
+          </a:effectRef>
+          <a:fontRef idx="minor">
+            <a:schemeClr val="lt1"/>
+          </a:fontRef>
+        </p:style>
+        <p:txBody>
+          <a:bodyPr rtlCol="0" anchor="ctr"/>
+          <a:lstStyle/>
+          <a:p>
+            <a:pPr algn="ctr"/>
+          </a:p>
+        </p:txBody>
+      </p:sp>
+      <p:sp>
+        <p:nvSpPr>
+          <p:cNvPr id="5" name="TextBox 4"/>
+          <p:cNvSpPr txBox="1"/>
+          <p:nvPr/>
+        </p:nvSpPr>
+        <p:spPr>
+          <a:xfrm>
+            <a:off x="640080" y="1325880"/>
+            <a:ext cx="10058400" cy="640080"/>
+          </a:xfrm>
+          <a:prstGeom prst="rect">
+            <a:avLst/>
+          </a:prstGeom>
+          <a:noFill/>
+        </p:spPr>
+        <p:txBody>
+          <a:bodyPr wrap="square" anchor="t" lIns="0" rIns="0" tIns="0" bIns="0">
+            <a:spAutoFit/>
+          </a:bodyPr>
+          <a:lstStyle/>
+          <a:p>
+            <a:pPr algn="l"/>
+            <a:r>
+              <a:rPr sz="3000" b="1">
+                <a:solidFill>
+                  <a:srgbClr val="1C2A33"/>
+                </a:solidFill>
+                <a:latin typeface="楷体"/>
+                <a:ea typeface="楷体"/>
+                <a:cs typeface="楷体"/>
+              </a:rPr>
+              <a:t>单元回望</a:t>
+            </a:r>
+          </a:p>
+        </p:txBody>
+      </p:sp>
+      <p:sp>
+        <p:nvSpPr>
+          <p:cNvPr id="6" name="Rounded Rectangle 5"/>
+          <p:cNvSpPr/>
+          <p:nvPr/>
+        </p:nvSpPr>
+        <p:spPr>
+          <a:xfrm>
+            <a:off x="640080" y="1828800"/>
+            <a:ext cx="10911535" cy="1371600"/>
+          </a:xfrm>
+          <a:prstGeom prst="roundRect">
+            <a:avLst/>
+          </a:prstGeom>
+          <a:solidFill>
+            <a:srgbClr val="1C2A33"/>
+          </a:solidFill>
+          <a:effectLst/>
+        </p:spPr>
+        <p:style>
+          <a:lnRef idx="1">
+            <a:schemeClr val="accent1"/>
+          </a:lnRef>
+          <a:fillRef idx="3">
+            <a:schemeClr val="accent1"/>
+          </a:fillRef>
+          <a:effectRef idx="2">
+            <a:schemeClr val="accent1"/>
+          </a:effectRef>
+          <a:fontRef idx="minor">
+            <a:schemeClr val="lt1"/>
+          </a:fontRef>
+        </p:style>
+        <p:txBody>
+          <a:bodyPr rtlCol="0" anchor="ctr"/>
+          <a:lstStyle/>
+          <a:p>
+            <a:pPr algn="ctr"/>
+          </a:p>
+        </p:txBody>
+      </p:sp>
+      <p:sp>
+        <p:nvSpPr>
+          <p:cNvPr id="7" name="TextBox 6"/>
+          <p:cNvSpPr txBox="1"/>
+          <p:nvPr/>
+        </p:nvSpPr>
+        <p:spPr>
+          <a:xfrm>
+            <a:off x="1005840" y="1965960"/>
+            <a:ext cx="10180015" cy="1097280"/>
+          </a:xfrm>
+          <a:prstGeom prst="rect">
+            <a:avLst/>
+          </a:prstGeom>
+          <a:noFill/>
+        </p:spPr>
+        <p:txBody>
+          <a:bodyPr wrap="square" anchor="t" lIns="0" rIns="0" tIns="0" bIns="0">
+            <a:spAutoFit/>
+          </a:bodyPr>
+          <a:lstStyle/>
+          <a:p>
+            <a:pPr algn="ctr">
+              <a:lnSpc>
+                <a:spcPct val="145000"/>
+              </a:lnSpc>
+            </a:pPr>
+            <a:r>
+              <a:rPr sz="1500" b="0">
+                <a:solidFill>
+                  <a:srgbClr val="FFFFFF"/>
+                </a:solidFill>
+                <a:latin typeface="楷体"/>
+                <a:ea typeface="楷体"/>
+                <a:cs typeface="楷体"/>
+              </a:rPr>
+              <a:t>本单元「词语积累与词语解释」：成语和熟语里藏着敬谦、科举、伦理等文化观念，是读懂传统的活化石。</a:t>
+            </a:r>
+          </a:p>
+        </p:txBody>
+      </p:sp>
+      <p:sp>
+        <p:nvSpPr>
+          <p:cNvPr id="8" name="Rounded Rectangle 7"/>
+          <p:cNvSpPr/>
+          <p:nvPr/>
+        </p:nvSpPr>
+        <p:spPr>
+          <a:xfrm>
+            <a:off x="640080" y="3474720"/>
+            <a:ext cx="10911535" cy="841248"/>
+          </a:xfrm>
+          <a:prstGeom prst="roundRect">
+            <a:avLst/>
+          </a:prstGeom>
+          <a:solidFill>
+            <a:srgbClr val="FFFFFF"/>
+          </a:solidFill>
+          <a:ln w="17780">
+            <a:solidFill>
+              <a:srgbClr val="B23A2A"/>
+            </a:solidFill>
+          </a:ln>
+          <a:effectLst/>
+        </p:spPr>
+        <p:style>
+          <a:lnRef idx="1">
+            <a:schemeClr val="accent1"/>
+          </a:lnRef>
+          <a:fillRef idx="3">
+            <a:schemeClr val="accent1"/>
+          </a:fillRef>
+          <a:effectRef idx="2">
+            <a:schemeClr val="accent1"/>
+          </a:effectRef>
+          <a:fontRef idx="minor">
+            <a:schemeClr val="lt1"/>
+          </a:fontRef>
+        </p:style>
+        <p:txBody>
+          <a:bodyPr rtlCol="0" anchor="ctr"/>
+          <a:lstStyle/>
+          <a:p>
+            <a:pPr algn="ctr"/>
+          </a:p>
+        </p:txBody>
+      </p:sp>
+      <p:sp>
+        <p:nvSpPr>
+          <p:cNvPr id="9" name="Oval 8"/>
+          <p:cNvSpPr/>
+          <p:nvPr/>
+        </p:nvSpPr>
+        <p:spPr>
+          <a:xfrm>
+            <a:off x="841248" y="3666744"/>
+            <a:ext cx="457200" cy="457200"/>
+          </a:xfrm>
+          <a:prstGeom prst="ellipse">
+            <a:avLst/>
+          </a:prstGeom>
+          <a:solidFill>
+            <a:srgbClr val="B23A2A"/>
+          </a:solidFill>
+          <a:ln>
+            <a:noFill/>
+          </a:ln>
+          <a:effectLst/>
+        </p:spPr>
+        <p:style>
+          <a:lnRef idx="1">
+            <a:schemeClr val="accent1"/>
+          </a:lnRef>
+          <a:fillRef idx="3">
+            <a:schemeClr val="accent1"/>
+          </a:fillRef>
+          <a:effectRef idx="2">
+            <a:schemeClr val="accent1"/>
+          </a:effectRef>
+          <a:fontRef idx="minor">
+            <a:schemeClr val="lt1"/>
+          </a:fontRef>
+        </p:style>
+        <p:txBody>
+          <a:bodyPr rtlCol="0" anchor="ctr"/>
+          <a:lstStyle/>
+          <a:p>
+            <a:pPr algn="ctr"/>
+          </a:p>
+        </p:txBody>
+      </p:sp>
+      <p:sp>
+        <p:nvSpPr>
+          <p:cNvPr id="10" name="TextBox 9"/>
+          <p:cNvSpPr txBox="1"/>
+          <p:nvPr/>
+        </p:nvSpPr>
+        <p:spPr>
+          <a:xfrm>
+            <a:off x="841248" y="3721608"/>
+            <a:ext cx="457200" cy="365760"/>
+          </a:xfrm>
+          <a:prstGeom prst="rect">
+            <a:avLst/>
+          </a:prstGeom>
+          <a:noFill/>
+        </p:spPr>
+        <p:txBody>
+          <a:bodyPr wrap="square" anchor="t" lIns="0" rIns="0" tIns="0" bIns="0">
+            <a:spAutoFit/>
+          </a:bodyPr>
+          <a:lstStyle/>
+          <a:p>
+            <a:pPr algn="ctr"/>
+            <a:r>
+              <a:rPr sz="1600" b="1">
+                <a:solidFill>
+                  <a:srgbClr val="FFFFFF"/>
+                </a:solidFill>
+                <a:latin typeface="微软雅黑"/>
+                <a:ea typeface="微软雅黑"/>
+                <a:cs typeface="微软雅黑"/>
+              </a:rPr>
+              <a:t>1</a:t>
+            </a:r>
+          </a:p>
+        </p:txBody>
+      </p:sp>
+      <p:sp>
+        <p:nvSpPr>
+          <p:cNvPr id="11" name="TextBox 10"/>
+          <p:cNvSpPr txBox="1"/>
+          <p:nvPr/>
+        </p:nvSpPr>
+        <p:spPr>
+          <a:xfrm>
+            <a:off x="1508760" y="3474720"/>
+            <a:ext cx="9905695" cy="841248"/>
+          </a:xfrm>
+          <a:prstGeom prst="rect">
+            <a:avLst/>
+          </a:prstGeom>
+          <a:noFill/>
+        </p:spPr>
+        <p:txBody>
+          <a:bodyPr wrap="square" anchor="ctr" lIns="0" rIns="0" tIns="0" bIns="0">
+            <a:spAutoFit/>
+          </a:bodyPr>
+          <a:lstStyle/>
+          <a:p>
+            <a:pPr algn="l">
+              <a:lnSpc>
+                <a:spcPct val="140000"/>
+              </a:lnSpc>
+            </a:pPr>
+            <a:r>
+              <a:rPr sz="1400" b="0">
+                <a:solidFill>
+                  <a:srgbClr val="1C2A33"/>
+                </a:solidFill>
+                <a:latin typeface="楷体"/>
+                <a:ea typeface="楷体"/>
+                <a:cs typeface="楷体"/>
+              </a:rPr>
+              <a:t>举一个带文化观念的词语，说说它背后的观念。</a:t>
+            </a:r>
+          </a:p>
+        </p:txBody>
+      </p:sp>
+      <p:sp>
+        <p:nvSpPr>
+          <p:cNvPr id="12" name="Rounded Rectangle 11"/>
+          <p:cNvSpPr/>
+          <p:nvPr/>
+        </p:nvSpPr>
+        <p:spPr>
+          <a:xfrm>
+            <a:off x="640080" y="4434840"/>
+            <a:ext cx="10911535" cy="841248"/>
+          </a:xfrm>
+          <a:prstGeom prst="roundRect">
+            <a:avLst/>
+          </a:prstGeom>
+          <a:solidFill>
+            <a:srgbClr val="FFFFFF"/>
+          </a:solidFill>
+          <a:ln w="17780">
+            <a:solidFill>
+              <a:srgbClr val="2E7D6B"/>
+            </a:solidFill>
+          </a:ln>
+          <a:effectLst/>
+        </p:spPr>
+        <p:style>
+          <a:lnRef idx="1">
+            <a:schemeClr val="accent1"/>
+          </a:lnRef>
+          <a:fillRef idx="3">
+            <a:schemeClr val="accent1"/>
+          </a:fillRef>
+          <a:effectRef idx="2">
+            <a:schemeClr val="accent1"/>
+          </a:effectRef>
+          <a:fontRef idx="minor">
+            <a:schemeClr val="lt1"/>
+          </a:fontRef>
+        </p:style>
+        <p:txBody>
+          <a:bodyPr rtlCol="0" anchor="ctr"/>
+          <a:lstStyle/>
+          <a:p>
+            <a:pPr algn="ctr"/>
+          </a:p>
+        </p:txBody>
+      </p:sp>
+      <p:sp>
+        <p:nvSpPr>
+          <p:cNvPr id="13" name="Oval 12"/>
+          <p:cNvSpPr/>
+          <p:nvPr/>
+        </p:nvSpPr>
+        <p:spPr>
+          <a:xfrm>
+            <a:off x="841248" y="4626864"/>
+            <a:ext cx="457200" cy="457200"/>
+          </a:xfrm>
+          <a:prstGeom prst="ellipse">
+            <a:avLst/>
+          </a:prstGeom>
+          <a:solidFill>
+            <a:srgbClr val="2E7D6B"/>
+          </a:solidFill>
+          <a:ln>
+            <a:noFill/>
+          </a:ln>
+          <a:effectLst/>
+        </p:spPr>
+        <p:style>
+          <a:lnRef idx="1">
+            <a:schemeClr val="accent1"/>
+          </a:lnRef>
+          <a:fillRef idx="3">
+            <a:schemeClr val="accent1"/>
+          </a:fillRef>
+          <a:effectRef idx="2">
+            <a:schemeClr val="accent1"/>
+          </a:effectRef>
+          <a:fontRef idx="minor">
+            <a:schemeClr val="lt1"/>
+          </a:fontRef>
+        </p:style>
+        <p:txBody>
+          <a:bodyPr rtlCol="0" anchor="ctr"/>
+          <a:lstStyle/>
+          <a:p>
+            <a:pPr algn="ctr"/>
+          </a:p>
+        </p:txBody>
+      </p:sp>
+      <p:sp>
+        <p:nvSpPr>
+          <p:cNvPr id="14" name="TextBox 13"/>
+          <p:cNvSpPr txBox="1"/>
+          <p:nvPr/>
+        </p:nvSpPr>
+        <p:spPr>
+          <a:xfrm>
+            <a:off x="841248" y="4681728"/>
+            <a:ext cx="457200" cy="365760"/>
+          </a:xfrm>
+          <a:prstGeom prst="rect">
+            <a:avLst/>
+          </a:prstGeom>
+          <a:noFill/>
+        </p:spPr>
+        <p:txBody>
+          <a:bodyPr wrap="square" anchor="t" lIns="0" rIns="0" tIns="0" bIns="0">
+            <a:spAutoFit/>
+          </a:bodyPr>
+          <a:lstStyle/>
+          <a:p>
+            <a:pPr algn="ctr"/>
+            <a:r>
+              <a:rPr sz="1600" b="1">
+                <a:solidFill>
+                  <a:srgbClr val="FFFFFF"/>
+                </a:solidFill>
+                <a:latin typeface="微软雅黑"/>
+                <a:ea typeface="微软雅黑"/>
+                <a:cs typeface="微软雅黑"/>
+              </a:rPr>
+              <a:t>2</a:t>
+            </a:r>
+          </a:p>
+        </p:txBody>
+      </p:sp>
+      <p:sp>
+        <p:nvSpPr>
+          <p:cNvPr id="15" name="TextBox 14"/>
+          <p:cNvSpPr txBox="1"/>
+          <p:nvPr/>
+        </p:nvSpPr>
+        <p:spPr>
+          <a:xfrm>
+            <a:off x="1508760" y="4434840"/>
+            <a:ext cx="9905695" cy="841248"/>
+          </a:xfrm>
+          <a:prstGeom prst="rect">
+            <a:avLst/>
+          </a:prstGeom>
+          <a:noFill/>
+        </p:spPr>
+        <p:txBody>
+          <a:bodyPr wrap="square" anchor="ctr" lIns="0" rIns="0" tIns="0" bIns="0">
+            <a:spAutoFit/>
+          </a:bodyPr>
+          <a:lstStyle/>
+          <a:p>
+            <a:pPr algn="l">
+              <a:lnSpc>
+                <a:spcPct val="140000"/>
+              </a:lnSpc>
+            </a:pPr>
+            <a:r>
+              <a:rPr sz="1400" b="0">
+                <a:solidFill>
+                  <a:srgbClr val="1C2A33"/>
+                </a:solidFill>
+                <a:latin typeface="楷体"/>
+                <a:ea typeface="楷体"/>
+                <a:cs typeface="楷体"/>
+              </a:rPr>
+              <a:t>为什么同一个意思，古人要用这么文雅的说法？</a:t>
+            </a:r>
+          </a:p>
+        </p:txBody>
+      </p:sp>
+      <p:sp>
+        <p:nvSpPr>
+          <p:cNvPr id="16" name="Rounded Rectangle 15"/>
+          <p:cNvSpPr/>
+          <p:nvPr/>
+        </p:nvSpPr>
+        <p:spPr>
+          <a:xfrm>
+            <a:off x="640080" y="5394960"/>
+            <a:ext cx="10911535" cy="841248"/>
+          </a:xfrm>
+          <a:prstGeom prst="roundRect">
+            <a:avLst/>
+          </a:prstGeom>
+          <a:solidFill>
+            <a:srgbClr val="FFFFFF"/>
+          </a:solidFill>
+          <a:ln w="17780">
+            <a:solidFill>
+              <a:srgbClr val="C8A86B"/>
+            </a:solidFill>
+          </a:ln>
+          <a:effectLst/>
+        </p:spPr>
+        <p:style>
+          <a:lnRef idx="1">
+            <a:schemeClr val="accent1"/>
+          </a:lnRef>
+          <a:fillRef idx="3">
+            <a:schemeClr val="accent1"/>
+          </a:fillRef>
+          <a:effectRef idx="2">
+            <a:schemeClr val="accent1"/>
+          </a:effectRef>
+          <a:fontRef idx="minor">
+            <a:schemeClr val="lt1"/>
+          </a:fontRef>
+        </p:style>
+        <p:txBody>
+          <a:bodyPr rtlCol="0" anchor="ctr"/>
+          <a:lstStyle/>
+          <a:p>
+            <a:pPr algn="ctr"/>
+          </a:p>
+        </p:txBody>
+      </p:sp>
+      <p:sp>
+        <p:nvSpPr>
+          <p:cNvPr id="17" name="Oval 16"/>
+          <p:cNvSpPr/>
+          <p:nvPr/>
+        </p:nvSpPr>
+        <p:spPr>
+          <a:xfrm>
+            <a:off x="841248" y="5586984"/>
+            <a:ext cx="457200" cy="457200"/>
+          </a:xfrm>
+          <a:prstGeom prst="ellipse">
             <a:avLst/>
           </a:prstGeom>
           <a:solidFill>
@@ -8307,58 +9358,14 @@
       </p:sp>
       <p:sp>
         <p:nvSpPr>
-          <p:cNvPr id="5" name="Rectangle 4"/>
-          <p:cNvSpPr/>
-          <p:nvPr/>
-        </p:nvSpPr>
-        <p:spPr>
-          <a:xfrm>
-            <a:off x="640080" y="1737360"/>
-            <a:ext cx="54864" cy="431800"/>
-          </a:xfrm>
-          <a:prstGeom prst="rect">
-            <a:avLst/>
-          </a:prstGeom>
-          <a:solidFill>
-            <a:srgbClr val="C8A86B"/>
-          </a:solidFill>
-          <a:ln>
-            <a:noFill/>
-          </a:ln>
-          <a:effectLst/>
-        </p:spPr>
-        <p:style>
-          <a:lnRef idx="1">
-            <a:schemeClr val="accent1"/>
-          </a:lnRef>
-          <a:fillRef idx="3">
-            <a:schemeClr val="accent1"/>
-          </a:fillRef>
-          <a:effectRef idx="2">
-            <a:schemeClr val="accent1"/>
-          </a:effectRef>
-          <a:fontRef idx="minor">
-            <a:schemeClr val="lt1"/>
-          </a:fontRef>
-        </p:style>
-        <p:txBody>
-          <a:bodyPr rtlCol="0" anchor="ctr"/>
-          <a:lstStyle/>
-          <a:p>
-            <a:pPr algn="ctr"/>
-          </a:p>
-        </p:txBody>
-      </p:sp>
-      <p:sp>
-        <p:nvSpPr>
-          <p:cNvPr id="6" name="TextBox 5"/>
+          <p:cNvPr id="18" name="TextBox 17"/>
           <p:cNvSpPr txBox="1"/>
           <p:nvPr/>
         </p:nvSpPr>
         <p:spPr>
           <a:xfrm>
-            <a:off x="868680" y="1645920"/>
-            <a:ext cx="10682935" cy="2194560"/>
+            <a:off x="841248" y="5641848"/>
+            <a:ext cx="457200" cy="365760"/>
           </a:xfrm>
           <a:prstGeom prst="rect">
             <a:avLst/>
@@ -8371,16 +9378,50 @@
           </a:bodyPr>
           <a:lstStyle/>
           <a:p>
+            <a:pPr algn="ctr"/>
+            <a:r>
+              <a:rPr sz="1600" b="1">
+                <a:solidFill>
+                  <a:srgbClr val="FFFFFF"/>
+                </a:solidFill>
+                <a:latin typeface="微软雅黑"/>
+                <a:ea typeface="微软雅黑"/>
+                <a:cs typeface="微软雅黑"/>
+              </a:rPr>
+              <a:t>3</a:t>
+            </a:r>
+          </a:p>
+        </p:txBody>
+      </p:sp>
+      <p:sp>
+        <p:nvSpPr>
+          <p:cNvPr id="19" name="TextBox 18"/>
+          <p:cNvSpPr txBox="1"/>
+          <p:nvPr/>
+        </p:nvSpPr>
+        <p:spPr>
+          <a:xfrm>
+            <a:off x="1508760" y="5394960"/>
+            <a:ext cx="9905695" cy="841248"/>
+          </a:xfrm>
+          <a:prstGeom prst="rect">
+            <a:avLst/>
+          </a:prstGeom>
+          <a:noFill/>
+        </p:spPr>
+        <p:txBody>
+          <a:bodyPr wrap="square" anchor="ctr" lIns="0" rIns="0" tIns="0" bIns="0">
+            <a:spAutoFit/>
+          </a:bodyPr>
+          <a:lstStyle/>
+          <a:p>
             <a:pPr algn="l">
               <a:lnSpc>
-                <a:spcPct val="150000"/>
+                <a:spcPct val="140000"/>
               </a:lnSpc>
-              <a:spcAft>
-                <a:spcPts val="1000"/>
-              </a:spcAft>
             </a:pPr>
             <a:r>
-              <a:rPr sz="2200" b="0">
+              <a:rPr sz="1400" b="0">
                 <a:solidFill>
                   <a:srgbClr val="1C2A33"/>
                 </a:solidFill>
@@ -8388,28 +9429,14 @@
                 <a:ea typeface="楷体"/>
                 <a:cs typeface="楷体"/>
               </a:rPr>
-              <a:t>本单元主题：词语积累与词语解释。把今天学到的方法带进下一篇——自己读、自己想、自己写。</a:t>
-            </a:r>
-          </a:p>
-          <a:p>
-            <a:pPr algn="l"/>
-            <a:r>
-              <a:rPr sz="1600" b="1">
-                <a:solidFill>
-                  <a:srgbClr val="B23A2A"/>
-                </a:solidFill>
-                <a:latin typeface="微软雅黑"/>
-                <a:ea typeface="微软雅黑"/>
-                <a:cs typeface="微软雅黑"/>
-              </a:rPr>
-              <a:t>方法迁移：圈关键信息 → 理事件脉络 → 析人物精神</a:t>
-            </a:r>
-          </a:p>
-        </p:txBody>
-      </p:sp>
-      <p:sp>
-        <p:nvSpPr>
-          <p:cNvPr id="7" name="TextBox 6"/>
+              <a:t>你愿意在作文里用哪类文化词，为什么？</a:t>
+            </a:r>
+          </a:p>
+        </p:txBody>
+      </p:sp>
+      <p:sp>
+        <p:nvSpPr>
+          <p:cNvPr id="20" name="TextBox 19"/>
           <p:cNvSpPr txBox="1"/>
           <p:nvPr/>
         </p:nvSpPr>
